--- a/garywu-interview.pptx
+++ b/garywu-interview.pptx
@@ -1747,7 +1747,7 @@
     <p:bg>
       <p:bgPr>
         <a:solidFill>
-          <a:srgbClr val="0D1117"/>
+          <a:srgbClr val="FFFFFF"/>
         </a:solidFill>
       </p:bgPr>
     </p:bg>
@@ -1792,7 +1792,7 @@
             <a:r>
               <a:rPr lang="en-US" sz="1400" b="1" spc="300" kern="0" dirty="0">
                 <a:solidFill>
-                  <a:srgbClr val="22D3EE"/>
+                  <a:srgbClr val="0369A1"/>
                 </a:solidFill>
                 <a:latin typeface="Consolas" pitchFamily="34" charset="0"/>
                 <a:ea typeface="Consolas" pitchFamily="34" charset="-122"/>
@@ -1806,7 +1806,7 @@
             <a:r>
               <a:rPr lang="en-US" sz="1400" spc="300" kern="0" dirty="0">
                 <a:solidFill>
-                  <a:srgbClr val="7D8590"/>
+                  <a:srgbClr val="6E7781"/>
                 </a:solidFill>
                 <a:latin typeface="Consolas" pitchFamily="34" charset="0"/>
                 <a:ea typeface="Consolas" pitchFamily="34" charset="-122"/>
@@ -1845,7 +1845,7 @@
             <a:r>
               <a:rPr lang="en-US" sz="5400" b="1" dirty="0">
                 <a:solidFill>
-                  <a:srgbClr val="E6EDF3"/>
+                  <a:srgbClr val="1F2328"/>
                 </a:solidFill>
                 <a:latin typeface="Microsoft JhengHei" pitchFamily="34" charset="0"/>
                 <a:ea typeface="Microsoft JhengHei" pitchFamily="34" charset="-122"/>
@@ -1859,7 +1859,7 @@
             <a:r>
               <a:rPr lang="en-US" sz="5400" b="1" dirty="0">
                 <a:solidFill>
-                  <a:srgbClr val="9DA7B3"/>
+                  <a:srgbClr val="57606A"/>
                 </a:solidFill>
                 <a:latin typeface="Microsoft JhengHei" pitchFamily="34" charset="0"/>
                 <a:ea typeface="Microsoft JhengHei" pitchFamily="34" charset="-122"/>
@@ -1898,7 +1898,7 @@
             <a:r>
               <a:rPr lang="en-US" sz="2400" b="1" dirty="0">
                 <a:solidFill>
-                  <a:srgbClr val="22D3EE"/>
+                  <a:srgbClr val="0369A1"/>
                 </a:solidFill>
                 <a:latin typeface="Microsoft JhengHei" pitchFamily="34" charset="0"/>
                 <a:ea typeface="Microsoft JhengHei" pitchFamily="34" charset="-122"/>
@@ -1912,7 +1912,7 @@
             <a:r>
               <a:rPr lang="en-US" sz="2400" b="1" dirty="0">
                 <a:solidFill>
-                  <a:srgbClr val="7D8590"/>
+                  <a:srgbClr val="6E7781"/>
                 </a:solidFill>
                 <a:latin typeface="Microsoft JhengHei" pitchFamily="34" charset="0"/>
                 <a:ea typeface="Microsoft JhengHei" pitchFamily="34" charset="-122"/>
@@ -1926,7 +1926,7 @@
             <a:r>
               <a:rPr lang="en-US" sz="2400" b="1" dirty="0">
                 <a:solidFill>
-                  <a:srgbClr val="F59E0B"/>
+                  <a:srgbClr val="B45309"/>
                 </a:solidFill>
                 <a:latin typeface="Microsoft JhengHei" pitchFamily="34" charset="0"/>
                 <a:ea typeface="Microsoft JhengHei" pitchFamily="34" charset="-122"/>
@@ -1968,7 +1968,7 @@
             <a:r>
               <a:rPr lang="en-US" sz="1500" dirty="0">
                 <a:solidFill>
-                  <a:srgbClr val="9DA7B3"/>
+                  <a:srgbClr val="57606A"/>
                 </a:solidFill>
                 <a:latin typeface="Microsoft JhengHei" pitchFamily="34" charset="0"/>
                 <a:ea typeface="Microsoft JhengHei" pitchFamily="34" charset="-122"/>
@@ -1988,7 +1988,7 @@
             <a:r>
               <a:rPr lang="en-US" sz="1500" dirty="0">
                 <a:solidFill>
-                  <a:srgbClr val="9DA7B3"/>
+                  <a:srgbClr val="57606A"/>
                 </a:solidFill>
                 <a:latin typeface="Microsoft JhengHei" pitchFamily="34" charset="0"/>
                 <a:ea typeface="Microsoft JhengHei" pitchFamily="34" charset="-122"/>
@@ -2027,7 +2027,7 @@
             <a:r>
               <a:rPr lang="en-US" sz="1250" dirty="0">
                 <a:solidFill>
-                  <a:srgbClr val="9DA7B3"/>
+                  <a:srgbClr val="57606A"/>
                 </a:solidFill>
                 <a:latin typeface="Consolas" pitchFamily="34" charset="0"/>
                 <a:ea typeface="Consolas" pitchFamily="34" charset="-122"/>
@@ -2041,7 +2041,7 @@
             <a:r>
               <a:rPr lang="en-US" sz="1250" dirty="0">
                 <a:solidFill>
-                  <a:srgbClr val="7D8590"/>
+                  <a:srgbClr val="6E7781"/>
                 </a:solidFill>
                 <a:latin typeface="Consolas" pitchFamily="34" charset="0"/>
                 <a:ea typeface="Consolas" pitchFamily="34" charset="-122"/>
@@ -2055,7 +2055,7 @@
             <a:r>
               <a:rPr lang="en-US" sz="1250" dirty="0">
                 <a:solidFill>
-                  <a:srgbClr val="9DA7B3"/>
+                  <a:srgbClr val="57606A"/>
                 </a:solidFill>
                 <a:latin typeface="Consolas" pitchFamily="34" charset="0"/>
                 <a:ea typeface="Consolas" pitchFamily="34" charset="-122"/>
@@ -2069,7 +2069,7 @@
             <a:r>
               <a:rPr lang="en-US" sz="1250" dirty="0">
                 <a:solidFill>
-                  <a:srgbClr val="7D8590"/>
+                  <a:srgbClr val="6E7781"/>
                 </a:solidFill>
                 <a:latin typeface="Consolas" pitchFamily="34" charset="0"/>
                 <a:ea typeface="Consolas" pitchFamily="34" charset="-122"/>
@@ -2083,7 +2083,7 @@
             <a:r>
               <a:rPr lang="en-US" sz="1250" dirty="0">
                 <a:solidFill>
-                  <a:srgbClr val="22D3EE"/>
+                  <a:srgbClr val="0369A1"/>
                 </a:solidFill>
                 <a:latin typeface="Consolas" pitchFamily="34" charset="0"/>
                 <a:ea typeface="Consolas" pitchFamily="34" charset="-122"/>
@@ -2136,7 +2136,7 @@
           <a:noFill/>
           <a:ln w="9525">
             <a:solidFill>
-              <a:srgbClr val="30363D"/>
+              <a:srgbClr val="D0D7DE"/>
             </a:solidFill>
             <a:prstDash val="solid"/>
           </a:ln>
@@ -2169,7 +2169,7 @@
             <a:r>
               <a:rPr lang="en-US" sz="1000" dirty="0">
                 <a:solidFill>
-                  <a:srgbClr val="7D8590"/>
+                  <a:srgbClr val="6E7781"/>
                 </a:solidFill>
                 <a:latin typeface="Consolas" pitchFamily="34" charset="0"/>
                 <a:ea typeface="Consolas" pitchFamily="34" charset="-122"/>
@@ -2195,7 +2195,7 @@
     <p:bg>
       <p:bgPr>
         <a:solidFill>
-          <a:srgbClr val="0D1117"/>
+          <a:srgbClr val="FFFFFF"/>
         </a:solidFill>
       </p:bgPr>
     </p:bg>
@@ -2230,7 +2230,7 @@
           <a:noFill/>
           <a:ln w="9525">
             <a:solidFill>
-              <a:srgbClr val="30363D"/>
+              <a:srgbClr val="D0D7DE"/>
             </a:solidFill>
             <a:prstDash val="solid"/>
           </a:ln>
@@ -2263,7 +2263,7 @@
             <a:r>
               <a:rPr lang="en-US" sz="900" b="1" dirty="0">
                 <a:solidFill>
-                  <a:srgbClr val="22D3EE"/>
+                  <a:srgbClr val="0369A1"/>
                 </a:solidFill>
                 <a:latin typeface="Consolas" pitchFamily="34" charset="0"/>
                 <a:ea typeface="Consolas" pitchFamily="34" charset="-122"/>
@@ -2277,7 +2277,7 @@
             <a:r>
               <a:rPr lang="en-US" sz="900" dirty="0">
                 <a:solidFill>
-                  <a:srgbClr val="7D8590"/>
+                  <a:srgbClr val="6E7781"/>
                 </a:solidFill>
                 <a:latin typeface="Consolas" pitchFamily="34" charset="0"/>
                 <a:ea typeface="Consolas" pitchFamily="34" charset="-122"/>
@@ -2316,7 +2316,7 @@
             <a:r>
               <a:rPr lang="en-US" sz="900" dirty="0">
                 <a:solidFill>
-                  <a:srgbClr val="7D8590"/>
+                  <a:srgbClr val="6E7781"/>
                 </a:solidFill>
                 <a:latin typeface="Consolas" pitchFamily="34" charset="0"/>
                 <a:ea typeface="Consolas" pitchFamily="34" charset="-122"/>
@@ -2355,7 +2355,7 @@
             <a:r>
               <a:rPr lang="en-US" sz="1100" b="1" spc="300" kern="0" dirty="0">
                 <a:solidFill>
-                  <a:srgbClr val="22D3EE"/>
+                  <a:srgbClr val="0369A1"/>
                 </a:solidFill>
                 <a:latin typeface="Consolas" pitchFamily="34" charset="0"/>
                 <a:ea typeface="Consolas" pitchFamily="34" charset="-122"/>
@@ -2394,7 +2394,7 @@
             <a:r>
               <a:rPr lang="en-US" sz="3000" b="1" dirty="0">
                 <a:solidFill>
-                  <a:srgbClr val="E6EDF3"/>
+                  <a:srgbClr val="1F2328"/>
                 </a:solidFill>
                 <a:latin typeface="Microsoft JhengHei" pitchFamily="34" charset="0"/>
                 <a:ea typeface="Microsoft JhengHei" pitchFamily="34" charset="-122"/>
@@ -2423,7 +2423,7 @@
           <a:noFill/>
           <a:ln w="31750">
             <a:solidFill>
-              <a:srgbClr val="22D3EE"/>
+              <a:srgbClr val="0369A1"/>
             </a:solidFill>
             <a:prstDash val="solid"/>
           </a:ln>
@@ -2446,11 +2446,11 @@
             </a:avLst>
           </a:prstGeom>
           <a:solidFill>
-            <a:srgbClr val="161B22"/>
+            <a:srgbClr val="F6F8FA"/>
           </a:solidFill>
           <a:ln w="15875">
             <a:solidFill>
-              <a:srgbClr val="22D3EE"/>
+              <a:srgbClr val="0369A1"/>
             </a:solidFill>
             <a:prstDash val="solid"/>
           </a:ln>
@@ -2483,7 +2483,7 @@
             <a:r>
               <a:rPr lang="en-US" sz="2200" b="1" dirty="0">
                 <a:solidFill>
-                  <a:srgbClr val="22D3EE"/>
+                  <a:srgbClr val="0369A1"/>
                 </a:solidFill>
                 <a:latin typeface="Consolas" pitchFamily="34" charset="0"/>
                 <a:ea typeface="Consolas" pitchFamily="34" charset="-122"/>
@@ -2522,7 +2522,7 @@
             <a:r>
               <a:rPr lang="en-US" sz="1700" b="1" dirty="0">
                 <a:solidFill>
-                  <a:srgbClr val="E6EDF3"/>
+                  <a:srgbClr val="1F2328"/>
                 </a:solidFill>
                 <a:latin typeface="Microsoft JhengHei" pitchFamily="34" charset="0"/>
                 <a:ea typeface="Microsoft JhengHei" pitchFamily="34" charset="-122"/>
@@ -2564,7 +2564,7 @@
             <a:r>
               <a:rPr lang="en-US" sz="1300" dirty="0">
                 <a:solidFill>
-                  <a:srgbClr val="9DA7B3"/>
+                  <a:srgbClr val="57606A"/>
                 </a:solidFill>
                 <a:latin typeface="Microsoft JhengHei" pitchFamily="34" charset="0"/>
                 <a:ea typeface="Microsoft JhengHei" pitchFamily="34" charset="-122"/>
@@ -2593,11 +2593,11 @@
             </a:avLst>
           </a:prstGeom>
           <a:solidFill>
-            <a:srgbClr val="161B22"/>
+            <a:srgbClr val="F6F8FA"/>
           </a:solidFill>
           <a:ln w="15875">
             <a:solidFill>
-              <a:srgbClr val="F59E0B"/>
+              <a:srgbClr val="B45309"/>
             </a:solidFill>
             <a:prstDash val="solid"/>
           </a:ln>
@@ -2630,7 +2630,7 @@
             <a:r>
               <a:rPr lang="en-US" sz="2200" b="1" dirty="0">
                 <a:solidFill>
-                  <a:srgbClr val="F59E0B"/>
+                  <a:srgbClr val="B45309"/>
                 </a:solidFill>
                 <a:latin typeface="Consolas" pitchFamily="34" charset="0"/>
                 <a:ea typeface="Consolas" pitchFamily="34" charset="-122"/>
@@ -2669,7 +2669,7 @@
             <a:r>
               <a:rPr lang="en-US" sz="1700" b="1" dirty="0">
                 <a:solidFill>
-                  <a:srgbClr val="E6EDF3"/>
+                  <a:srgbClr val="1F2328"/>
                 </a:solidFill>
                 <a:latin typeface="Microsoft JhengHei" pitchFamily="34" charset="0"/>
                 <a:ea typeface="Microsoft JhengHei" pitchFamily="34" charset="-122"/>
@@ -2711,7 +2711,7 @@
             <a:r>
               <a:rPr lang="en-US" sz="1300" dirty="0">
                 <a:solidFill>
-                  <a:srgbClr val="9DA7B3"/>
+                  <a:srgbClr val="57606A"/>
                 </a:solidFill>
                 <a:latin typeface="Microsoft JhengHei" pitchFamily="34" charset="0"/>
                 <a:ea typeface="Microsoft JhengHei" pitchFamily="34" charset="-122"/>
@@ -2740,11 +2740,11 @@
             </a:avLst>
           </a:prstGeom>
           <a:solidFill>
-            <a:srgbClr val="161B22"/>
+            <a:srgbClr val="F6F8FA"/>
           </a:solidFill>
           <a:ln w="15875">
             <a:solidFill>
-              <a:srgbClr val="22D3EE"/>
+              <a:srgbClr val="0369A1"/>
             </a:solidFill>
             <a:prstDash val="solid"/>
           </a:ln>
@@ -2777,7 +2777,7 @@
             <a:r>
               <a:rPr lang="en-US" sz="2200" b="1" dirty="0">
                 <a:solidFill>
-                  <a:srgbClr val="22D3EE"/>
+                  <a:srgbClr val="0369A1"/>
                 </a:solidFill>
                 <a:latin typeface="Consolas" pitchFamily="34" charset="0"/>
                 <a:ea typeface="Consolas" pitchFamily="34" charset="-122"/>
@@ -2816,7 +2816,7 @@
             <a:r>
               <a:rPr lang="en-US" sz="1700" b="1" dirty="0">
                 <a:solidFill>
-                  <a:srgbClr val="E6EDF3"/>
+                  <a:srgbClr val="1F2328"/>
                 </a:solidFill>
                 <a:latin typeface="Microsoft JhengHei" pitchFamily="34" charset="0"/>
                 <a:ea typeface="Microsoft JhengHei" pitchFamily="34" charset="-122"/>
@@ -2858,7 +2858,7 @@
             <a:r>
               <a:rPr lang="en-US" sz="1300" dirty="0">
                 <a:solidFill>
-                  <a:srgbClr val="9DA7B3"/>
+                  <a:srgbClr val="57606A"/>
                 </a:solidFill>
                 <a:latin typeface="Microsoft JhengHei" pitchFamily="34" charset="0"/>
                 <a:ea typeface="Microsoft JhengHei" pitchFamily="34" charset="-122"/>
@@ -2884,7 +2884,7 @@
     <p:bg>
       <p:bgPr>
         <a:solidFill>
-          <a:srgbClr val="0D1117"/>
+          <a:srgbClr val="FFFFFF"/>
         </a:solidFill>
       </p:bgPr>
     </p:bg>
@@ -2929,7 +2929,7 @@
             <a:r>
               <a:rPr lang="en-US" sz="1400" b="1" spc="300" kern="0" dirty="0">
                 <a:solidFill>
-                  <a:srgbClr val="22D3EE"/>
+                  <a:srgbClr val="0369A1"/>
                 </a:solidFill>
                 <a:latin typeface="Consolas" pitchFamily="34" charset="0"/>
                 <a:ea typeface="Consolas" pitchFamily="34" charset="-122"/>
@@ -2943,7 +2943,7 @@
             <a:r>
               <a:rPr lang="en-US" sz="1400" spc="300" kern="0" dirty="0">
                 <a:solidFill>
-                  <a:srgbClr val="7D8590"/>
+                  <a:srgbClr val="6E7781"/>
                 </a:solidFill>
                 <a:latin typeface="Consolas" pitchFamily="34" charset="0"/>
                 <a:ea typeface="Consolas" pitchFamily="34" charset="-122"/>
@@ -2982,7 +2982,7 @@
             <a:r>
               <a:rPr lang="en-US" sz="3400" b="1" dirty="0">
                 <a:solidFill>
-                  <a:srgbClr val="E6EDF3"/>
+                  <a:srgbClr val="1F2328"/>
                 </a:solidFill>
                 <a:latin typeface="Microsoft JhengHei" pitchFamily="34" charset="0"/>
                 <a:ea typeface="Microsoft JhengHei" pitchFamily="34" charset="-122"/>
@@ -3021,7 +3021,7 @@
             <a:r>
               <a:rPr lang="en-US" sz="1300" b="1" dirty="0">
                 <a:solidFill>
-                  <a:srgbClr val="F59E0B"/>
+                  <a:srgbClr val="B45309"/>
                 </a:solidFill>
                 <a:latin typeface="Consolas" pitchFamily="34" charset="0"/>
                 <a:ea typeface="Consolas" pitchFamily="34" charset="-122"/>
@@ -3060,7 +3060,7 @@
             <a:r>
               <a:rPr lang="en-US" sz="1300" dirty="0">
                 <a:solidFill>
-                  <a:srgbClr val="E6EDF3"/>
+                  <a:srgbClr val="1F2328"/>
                 </a:solidFill>
                 <a:latin typeface="Consolas" pitchFamily="34" charset="0"/>
                 <a:ea typeface="Consolas" pitchFamily="34" charset="-122"/>
@@ -3099,7 +3099,7 @@
             <a:r>
               <a:rPr lang="en-US" sz="1300" b="1" dirty="0">
                 <a:solidFill>
-                  <a:srgbClr val="F59E0B"/>
+                  <a:srgbClr val="B45309"/>
                 </a:solidFill>
                 <a:latin typeface="Consolas" pitchFamily="34" charset="0"/>
                 <a:ea typeface="Consolas" pitchFamily="34" charset="-122"/>
@@ -3138,7 +3138,7 @@
             <a:r>
               <a:rPr lang="en-US" sz="1300" dirty="0">
                 <a:solidFill>
-                  <a:srgbClr val="E6EDF3"/>
+                  <a:srgbClr val="1F2328"/>
                 </a:solidFill>
                 <a:latin typeface="Consolas" pitchFamily="34" charset="0"/>
                 <a:ea typeface="Consolas" pitchFamily="34" charset="-122"/>
@@ -3177,7 +3177,7 @@
             <a:r>
               <a:rPr lang="en-US" sz="1300" b="1" dirty="0">
                 <a:solidFill>
-                  <a:srgbClr val="F59E0B"/>
+                  <a:srgbClr val="B45309"/>
                 </a:solidFill>
                 <a:latin typeface="Consolas" pitchFamily="34" charset="0"/>
                 <a:ea typeface="Consolas" pitchFamily="34" charset="-122"/>
@@ -3216,7 +3216,7 @@
             <a:r>
               <a:rPr lang="en-US" sz="1300" dirty="0">
                 <a:solidFill>
-                  <a:srgbClr val="E6EDF3"/>
+                  <a:srgbClr val="1F2328"/>
                 </a:solidFill>
                 <a:latin typeface="Consolas" pitchFamily="34" charset="0"/>
                 <a:ea typeface="Consolas" pitchFamily="34" charset="-122"/>
@@ -3255,7 +3255,7 @@
             <a:r>
               <a:rPr lang="en-US" sz="1300" b="1" dirty="0">
                 <a:solidFill>
-                  <a:srgbClr val="F59E0B"/>
+                  <a:srgbClr val="B45309"/>
                 </a:solidFill>
                 <a:latin typeface="Consolas" pitchFamily="34" charset="0"/>
                 <a:ea typeface="Consolas" pitchFamily="34" charset="-122"/>
@@ -3294,7 +3294,7 @@
             <a:r>
               <a:rPr lang="en-US" sz="1300" dirty="0">
                 <a:solidFill>
-                  <a:srgbClr val="E6EDF3"/>
+                  <a:srgbClr val="1F2328"/>
                 </a:solidFill>
                 <a:latin typeface="Consolas" pitchFamily="34" charset="0"/>
                 <a:ea typeface="Consolas" pitchFamily="34" charset="-122"/>
@@ -3323,7 +3323,7 @@
           <a:noFill/>
           <a:ln w="9525">
             <a:solidFill>
-              <a:srgbClr val="30363D"/>
+              <a:srgbClr val="D0D7DE"/>
             </a:solidFill>
             <a:prstDash val="solid"/>
           </a:ln>
@@ -3356,7 +3356,7 @@
             <a:r>
               <a:rPr lang="en-US" sz="1100" dirty="0">
                 <a:solidFill>
-                  <a:srgbClr val="7D8590"/>
+                  <a:srgbClr val="6E7781"/>
                 </a:solidFill>
                 <a:latin typeface="Consolas" pitchFamily="34" charset="0"/>
                 <a:ea typeface="Consolas" pitchFamily="34" charset="-122"/>
@@ -3382,7 +3382,7 @@
     <p:bg>
       <p:bgPr>
         <a:solidFill>
-          <a:srgbClr val="0D1117"/>
+          <a:srgbClr val="FFFFFF"/>
         </a:solidFill>
       </p:bgPr>
     </p:bg>
@@ -3417,7 +3417,7 @@
           <a:noFill/>
           <a:ln w="9525">
             <a:solidFill>
-              <a:srgbClr val="30363D"/>
+              <a:srgbClr val="D0D7DE"/>
             </a:solidFill>
             <a:prstDash val="solid"/>
           </a:ln>
@@ -3450,7 +3450,7 @@
             <a:r>
               <a:rPr lang="en-US" sz="900" b="1" dirty="0">
                 <a:solidFill>
-                  <a:srgbClr val="22D3EE"/>
+                  <a:srgbClr val="0369A1"/>
                 </a:solidFill>
                 <a:latin typeface="Consolas" pitchFamily="34" charset="0"/>
                 <a:ea typeface="Consolas" pitchFamily="34" charset="-122"/>
@@ -3464,7 +3464,7 @@
             <a:r>
               <a:rPr lang="en-US" sz="900" dirty="0">
                 <a:solidFill>
-                  <a:srgbClr val="7D8590"/>
+                  <a:srgbClr val="6E7781"/>
                 </a:solidFill>
                 <a:latin typeface="Consolas" pitchFamily="34" charset="0"/>
                 <a:ea typeface="Consolas" pitchFamily="34" charset="-122"/>
@@ -3503,7 +3503,7 @@
             <a:r>
               <a:rPr lang="en-US" sz="900" dirty="0">
                 <a:solidFill>
-                  <a:srgbClr val="7D8590"/>
+                  <a:srgbClr val="6E7781"/>
                 </a:solidFill>
                 <a:latin typeface="Consolas" pitchFamily="34" charset="0"/>
                 <a:ea typeface="Consolas" pitchFamily="34" charset="-122"/>
@@ -3542,7 +3542,7 @@
             <a:r>
               <a:rPr lang="en-US" sz="1100" b="1" spc="300" kern="0" dirty="0">
                 <a:solidFill>
-                  <a:srgbClr val="22D3EE"/>
+                  <a:srgbClr val="0369A1"/>
                 </a:solidFill>
                 <a:latin typeface="Consolas" pitchFamily="34" charset="0"/>
                 <a:ea typeface="Consolas" pitchFamily="34" charset="-122"/>
@@ -3581,7 +3581,7 @@
             <a:r>
               <a:rPr lang="en-US" sz="3000" b="1" dirty="0">
                 <a:solidFill>
-                  <a:srgbClr val="E6EDF3"/>
+                  <a:srgbClr val="1F2328"/>
                 </a:solidFill>
                 <a:latin typeface="Microsoft JhengHei" pitchFamily="34" charset="0"/>
                 <a:ea typeface="Microsoft JhengHei" pitchFamily="34" charset="-122"/>
@@ -3610,7 +3610,7 @@
           <a:noFill/>
           <a:ln w="31750">
             <a:solidFill>
-              <a:srgbClr val="22D3EE"/>
+              <a:srgbClr val="0369A1"/>
             </a:solidFill>
             <a:prstDash val="solid"/>
           </a:ln>
@@ -3649,7 +3649,7 @@
             <a:r>
               <a:rPr lang="en-US" sz="1500" b="1" dirty="0">
                 <a:solidFill>
-                  <a:srgbClr val="22D3EE"/>
+                  <a:srgbClr val="0369A1"/>
                 </a:solidFill>
                 <a:latin typeface="Consolas" pitchFamily="34" charset="0"/>
                 <a:ea typeface="Consolas" pitchFamily="34" charset="-122"/>
@@ -3669,7 +3669,7 @@
             <a:r>
               <a:rPr lang="en-US" sz="1500" b="1" dirty="0">
                 <a:solidFill>
-                  <a:srgbClr val="E6EDF3"/>
+                  <a:srgbClr val="1F2328"/>
                 </a:solidFill>
                 <a:latin typeface="Microsoft JhengHei" pitchFamily="34" charset="0"/>
                 <a:ea typeface="Microsoft JhengHei" pitchFamily="34" charset="-122"/>
@@ -3689,7 +3689,7 @@
             <a:r>
               <a:rPr lang="en-US" sz="1500" dirty="0">
                 <a:solidFill>
-                  <a:srgbClr val="E6EDF3"/>
+                  <a:srgbClr val="1F2328"/>
                 </a:solidFill>
                 <a:latin typeface="Microsoft JhengHei" pitchFamily="34" charset="0"/>
                 <a:ea typeface="Microsoft JhengHei" pitchFamily="34" charset="-122"/>
@@ -3712,7 +3712,7 @@
             <a:r>
               <a:rPr lang="en-US" sz="1500" b="1" dirty="0">
                 <a:solidFill>
-                  <a:srgbClr val="22D3EE"/>
+                  <a:srgbClr val="0369A1"/>
                 </a:solidFill>
                 <a:latin typeface="Consolas" pitchFamily="34" charset="0"/>
                 <a:ea typeface="Consolas" pitchFamily="34" charset="-122"/>
@@ -3732,7 +3732,7 @@
             <a:r>
               <a:rPr lang="en-US" sz="1500" b="1" dirty="0">
                 <a:solidFill>
-                  <a:srgbClr val="E6EDF3"/>
+                  <a:srgbClr val="1F2328"/>
                 </a:solidFill>
                 <a:latin typeface="Microsoft JhengHei" pitchFamily="34" charset="0"/>
                 <a:ea typeface="Microsoft JhengHei" pitchFamily="34" charset="-122"/>
@@ -3752,7 +3752,7 @@
             <a:r>
               <a:rPr lang="en-US" sz="1500" dirty="0">
                 <a:solidFill>
-                  <a:srgbClr val="E6EDF3"/>
+                  <a:srgbClr val="1F2328"/>
                 </a:solidFill>
                 <a:latin typeface="Microsoft JhengHei" pitchFamily="34" charset="0"/>
                 <a:ea typeface="Microsoft JhengHei" pitchFamily="34" charset="-122"/>
@@ -3775,7 +3775,7 @@
             <a:r>
               <a:rPr lang="en-US" sz="1500" b="1" dirty="0">
                 <a:solidFill>
-                  <a:srgbClr val="22D3EE"/>
+                  <a:srgbClr val="0369A1"/>
                 </a:solidFill>
                 <a:latin typeface="Consolas" pitchFamily="34" charset="0"/>
                 <a:ea typeface="Consolas" pitchFamily="34" charset="-122"/>
@@ -3795,7 +3795,7 @@
             <a:r>
               <a:rPr lang="en-US" sz="1500" b="1" dirty="0">
                 <a:solidFill>
-                  <a:srgbClr val="E6EDF3"/>
+                  <a:srgbClr val="1F2328"/>
                 </a:solidFill>
                 <a:latin typeface="Microsoft JhengHei" pitchFamily="34" charset="0"/>
                 <a:ea typeface="Microsoft JhengHei" pitchFamily="34" charset="-122"/>
@@ -3815,7 +3815,7 @@
             <a:r>
               <a:rPr lang="en-US" sz="1500" dirty="0">
                 <a:solidFill>
-                  <a:srgbClr val="E6EDF3"/>
+                  <a:srgbClr val="1F2328"/>
                 </a:solidFill>
                 <a:latin typeface="Microsoft JhengHei" pitchFamily="34" charset="0"/>
                 <a:ea typeface="Microsoft JhengHei" pitchFamily="34" charset="-122"/>
@@ -3838,7 +3838,7 @@
             <a:r>
               <a:rPr lang="en-US" sz="1500" b="1" dirty="0">
                 <a:solidFill>
-                  <a:srgbClr val="22D3EE"/>
+                  <a:srgbClr val="0369A1"/>
                 </a:solidFill>
                 <a:latin typeface="Consolas" pitchFamily="34" charset="0"/>
                 <a:ea typeface="Consolas" pitchFamily="34" charset="-122"/>
@@ -3858,7 +3858,7 @@
             <a:r>
               <a:rPr lang="en-US" sz="1500" b="1" dirty="0">
                 <a:solidFill>
-                  <a:srgbClr val="E6EDF3"/>
+                  <a:srgbClr val="1F2328"/>
                 </a:solidFill>
                 <a:latin typeface="Microsoft JhengHei" pitchFamily="34" charset="0"/>
                 <a:ea typeface="Microsoft JhengHei" pitchFamily="34" charset="-122"/>
@@ -3878,7 +3878,7 @@
             <a:r>
               <a:rPr lang="en-US" sz="1500" dirty="0">
                 <a:solidFill>
-                  <a:srgbClr val="E6EDF3"/>
+                  <a:srgbClr val="1F2328"/>
                 </a:solidFill>
                 <a:latin typeface="Microsoft JhengHei" pitchFamily="34" charset="0"/>
                 <a:ea typeface="Microsoft JhengHei" pitchFamily="34" charset="-122"/>
@@ -3901,7 +3901,7 @@
             <a:r>
               <a:rPr lang="en-US" sz="1500" b="1" dirty="0">
                 <a:solidFill>
-                  <a:srgbClr val="22D3EE"/>
+                  <a:srgbClr val="0369A1"/>
                 </a:solidFill>
                 <a:latin typeface="Consolas" pitchFamily="34" charset="0"/>
                 <a:ea typeface="Consolas" pitchFamily="34" charset="-122"/>
@@ -3921,7 +3921,7 @@
             <a:r>
               <a:rPr lang="en-US" sz="1500" dirty="0">
                 <a:solidFill>
-                  <a:srgbClr val="E6EDF3"/>
+                  <a:srgbClr val="1F2328"/>
                 </a:solidFill>
                 <a:latin typeface="Microsoft JhengHei" pitchFamily="34" charset="0"/>
                 <a:ea typeface="Microsoft JhengHei" pitchFamily="34" charset="-122"/>
@@ -3941,7 +3941,7 @@
             <a:r>
               <a:rPr lang="en-US" sz="1500" b="1" dirty="0">
                 <a:solidFill>
-                  <a:srgbClr val="E6EDF3"/>
+                  <a:srgbClr val="1F2328"/>
                 </a:solidFill>
                 <a:latin typeface="Consolas" pitchFamily="34" charset="0"/>
                 <a:ea typeface="Consolas" pitchFamily="34" charset="-122"/>
@@ -3961,7 +3961,7 @@
             <a:r>
               <a:rPr lang="en-US" sz="1500" dirty="0">
                 <a:solidFill>
-                  <a:srgbClr val="E6EDF3"/>
+                  <a:srgbClr val="1F2328"/>
                 </a:solidFill>
                 <a:latin typeface="Microsoft JhengHei" pitchFamily="34" charset="0"/>
                 <a:ea typeface="Microsoft JhengHei" pitchFamily="34" charset="-122"/>
@@ -3990,11 +3990,11 @@
             </a:avLst>
           </a:prstGeom>
           <a:solidFill>
-            <a:srgbClr val="161B22"/>
+            <a:srgbClr val="F6F8FA"/>
           </a:solidFill>
           <a:ln w="9525">
             <a:solidFill>
-              <a:srgbClr val="30363D"/>
+              <a:srgbClr val="D0D7DE"/>
             </a:solidFill>
             <a:prstDash val="solid"/>
           </a:ln>
@@ -4027,7 +4027,7 @@
             <a:r>
               <a:rPr lang="en-US" sz="1000" b="1" spc="200" kern="0" dirty="0">
                 <a:solidFill>
-                  <a:srgbClr val="22D3EE"/>
+                  <a:srgbClr val="0369A1"/>
                 </a:solidFill>
                 <a:latin typeface="Consolas" pitchFamily="34" charset="0"/>
                 <a:ea typeface="Consolas" pitchFamily="34" charset="-122"/>
@@ -4066,7 +4066,7 @@
             <a:r>
               <a:rPr lang="en-US" sz="1200" b="1" dirty="0">
                 <a:solidFill>
-                  <a:srgbClr val="F59E0B"/>
+                  <a:srgbClr val="B45309"/>
                 </a:solidFill>
                 <a:latin typeface="Consolas" pitchFamily="34" charset="0"/>
                 <a:ea typeface="Consolas" pitchFamily="34" charset="-122"/>
@@ -4105,7 +4105,7 @@
             <a:r>
               <a:rPr lang="en-US" sz="1150" dirty="0">
                 <a:solidFill>
-                  <a:srgbClr val="9DA7B3"/>
+                  <a:srgbClr val="57606A"/>
                 </a:solidFill>
                 <a:latin typeface="Microsoft JhengHei" pitchFamily="34" charset="0"/>
                 <a:ea typeface="Microsoft JhengHei" pitchFamily="34" charset="-122"/>
@@ -4144,7 +4144,7 @@
             <a:r>
               <a:rPr lang="en-US" sz="1200" b="1" dirty="0">
                 <a:solidFill>
-                  <a:srgbClr val="F59E0B"/>
+                  <a:srgbClr val="B45309"/>
                 </a:solidFill>
                 <a:latin typeface="Consolas" pitchFamily="34" charset="0"/>
                 <a:ea typeface="Consolas" pitchFamily="34" charset="-122"/>
@@ -4183,7 +4183,7 @@
             <a:r>
               <a:rPr lang="en-US" sz="1150" dirty="0">
                 <a:solidFill>
-                  <a:srgbClr val="9DA7B3"/>
+                  <a:srgbClr val="57606A"/>
                 </a:solidFill>
                 <a:latin typeface="Microsoft JhengHei" pitchFamily="34" charset="0"/>
                 <a:ea typeface="Microsoft JhengHei" pitchFamily="34" charset="-122"/>
@@ -4222,7 +4222,7 @@
             <a:r>
               <a:rPr lang="en-US" sz="1200" b="1" dirty="0">
                 <a:solidFill>
-                  <a:srgbClr val="F59E0B"/>
+                  <a:srgbClr val="B45309"/>
                 </a:solidFill>
                 <a:latin typeface="Consolas" pitchFamily="34" charset="0"/>
                 <a:ea typeface="Consolas" pitchFamily="34" charset="-122"/>
@@ -4261,7 +4261,7 @@
             <a:r>
               <a:rPr lang="en-US" sz="1150" dirty="0">
                 <a:solidFill>
-                  <a:srgbClr val="9DA7B3"/>
+                  <a:srgbClr val="57606A"/>
                 </a:solidFill>
                 <a:latin typeface="Microsoft JhengHei" pitchFamily="34" charset="0"/>
                 <a:ea typeface="Microsoft JhengHei" pitchFamily="34" charset="-122"/>
@@ -4300,7 +4300,7 @@
             <a:r>
               <a:rPr lang="en-US" sz="1200" b="1" dirty="0">
                 <a:solidFill>
-                  <a:srgbClr val="F59E0B"/>
+                  <a:srgbClr val="B45309"/>
                 </a:solidFill>
                 <a:latin typeface="Consolas" pitchFamily="34" charset="0"/>
                 <a:ea typeface="Consolas" pitchFamily="34" charset="-122"/>
@@ -4339,7 +4339,7 @@
             <a:r>
               <a:rPr lang="en-US" sz="1150" dirty="0">
                 <a:solidFill>
-                  <a:srgbClr val="9DA7B3"/>
+                  <a:srgbClr val="57606A"/>
                 </a:solidFill>
                 <a:latin typeface="Microsoft JhengHei" pitchFamily="34" charset="0"/>
                 <a:ea typeface="Microsoft JhengHei" pitchFamily="34" charset="-122"/>
@@ -4365,7 +4365,7 @@
     <p:bg>
       <p:bgPr>
         <a:solidFill>
-          <a:srgbClr val="0D1117"/>
+          <a:srgbClr val="FFFFFF"/>
         </a:solidFill>
       </p:bgPr>
     </p:bg>
@@ -4400,7 +4400,7 @@
           <a:noFill/>
           <a:ln w="9525">
             <a:solidFill>
-              <a:srgbClr val="30363D"/>
+              <a:srgbClr val="D0D7DE"/>
             </a:solidFill>
             <a:prstDash val="solid"/>
           </a:ln>
@@ -4433,7 +4433,7 @@
             <a:r>
               <a:rPr lang="en-US" sz="900" b="1" dirty="0">
                 <a:solidFill>
-                  <a:srgbClr val="22D3EE"/>
+                  <a:srgbClr val="0369A1"/>
                 </a:solidFill>
                 <a:latin typeface="Consolas" pitchFamily="34" charset="0"/>
                 <a:ea typeface="Consolas" pitchFamily="34" charset="-122"/>
@@ -4447,7 +4447,7 @@
             <a:r>
               <a:rPr lang="en-US" sz="900" dirty="0">
                 <a:solidFill>
-                  <a:srgbClr val="7D8590"/>
+                  <a:srgbClr val="6E7781"/>
                 </a:solidFill>
                 <a:latin typeface="Consolas" pitchFamily="34" charset="0"/>
                 <a:ea typeface="Consolas" pitchFamily="34" charset="-122"/>
@@ -4486,7 +4486,7 @@
             <a:r>
               <a:rPr lang="en-US" sz="900" dirty="0">
                 <a:solidFill>
-                  <a:srgbClr val="7D8590"/>
+                  <a:srgbClr val="6E7781"/>
                 </a:solidFill>
                 <a:latin typeface="Consolas" pitchFamily="34" charset="0"/>
                 <a:ea typeface="Consolas" pitchFamily="34" charset="-122"/>
@@ -4525,7 +4525,7 @@
             <a:r>
               <a:rPr lang="en-US" sz="1100" b="1" spc="300" kern="0" dirty="0">
                 <a:solidFill>
-                  <a:srgbClr val="22D3EE"/>
+                  <a:srgbClr val="0369A1"/>
                 </a:solidFill>
                 <a:latin typeface="Consolas" pitchFamily="34" charset="0"/>
                 <a:ea typeface="Consolas" pitchFamily="34" charset="-122"/>
@@ -4564,7 +4564,7 @@
             <a:r>
               <a:rPr lang="en-US" sz="3000" b="1" dirty="0">
                 <a:solidFill>
-                  <a:srgbClr val="E6EDF3"/>
+                  <a:srgbClr val="1F2328"/>
                 </a:solidFill>
                 <a:latin typeface="Microsoft JhengHei" pitchFamily="34" charset="0"/>
                 <a:ea typeface="Microsoft JhengHei" pitchFamily="34" charset="-122"/>
@@ -4593,7 +4593,7 @@
           <a:noFill/>
           <a:ln w="31750">
             <a:solidFill>
-              <a:srgbClr val="22D3EE"/>
+              <a:srgbClr val="0369A1"/>
             </a:solidFill>
             <a:prstDash val="solid"/>
           </a:ln>
@@ -4616,11 +4616,11 @@
             </a:avLst>
           </a:prstGeom>
           <a:solidFill>
-            <a:srgbClr val="161B22"/>
+            <a:srgbClr val="F6F8FA"/>
           </a:solidFill>
           <a:ln w="9525">
             <a:solidFill>
-              <a:srgbClr val="30363D"/>
+              <a:srgbClr val="D0D7DE"/>
             </a:solidFill>
             <a:prstDash val="solid"/>
           </a:ln>
@@ -4653,7 +4653,7 @@
             <a:r>
               <a:rPr lang="en-US" sz="3000" b="1" dirty="0">
                 <a:solidFill>
-                  <a:srgbClr val="22D3EE"/>
+                  <a:srgbClr val="0369A1"/>
                 </a:solidFill>
                 <a:latin typeface="Consolas" pitchFamily="34" charset="0"/>
                 <a:ea typeface="Consolas" pitchFamily="34" charset="-122"/>
@@ -4692,7 +4692,7 @@
             <a:r>
               <a:rPr lang="en-US" sz="1150" dirty="0">
                 <a:solidFill>
-                  <a:srgbClr val="9DA7B3"/>
+                  <a:srgbClr val="57606A"/>
                 </a:solidFill>
                 <a:latin typeface="Microsoft JhengHei" pitchFamily="34" charset="0"/>
                 <a:ea typeface="Microsoft JhengHei" pitchFamily="34" charset="-122"/>
@@ -4709,7 +4709,7 @@
             <a:r>
               <a:rPr lang="en-US" sz="1150" dirty="0">
                 <a:solidFill>
-                  <a:srgbClr val="9DA7B3"/>
+                  <a:srgbClr val="57606A"/>
                 </a:solidFill>
                 <a:latin typeface="Microsoft JhengHei" pitchFamily="34" charset="0"/>
                 <a:ea typeface="Microsoft JhengHei" pitchFamily="34" charset="-122"/>
@@ -4738,11 +4738,11 @@
             </a:avLst>
           </a:prstGeom>
           <a:solidFill>
-            <a:srgbClr val="161B22"/>
+            <a:srgbClr val="F6F8FA"/>
           </a:solidFill>
           <a:ln w="9525">
             <a:solidFill>
-              <a:srgbClr val="30363D"/>
+              <a:srgbClr val="D0D7DE"/>
             </a:solidFill>
             <a:prstDash val="solid"/>
           </a:ln>
@@ -4775,7 +4775,7 @@
             <a:r>
               <a:rPr lang="en-US" sz="3000" b="1" dirty="0">
                 <a:solidFill>
-                  <a:srgbClr val="F59E0B"/>
+                  <a:srgbClr val="B45309"/>
                 </a:solidFill>
                 <a:latin typeface="Consolas" pitchFamily="34" charset="0"/>
                 <a:ea typeface="Consolas" pitchFamily="34" charset="-122"/>
@@ -4814,7 +4814,7 @@
             <a:r>
               <a:rPr lang="en-US" sz="1150" dirty="0">
                 <a:solidFill>
-                  <a:srgbClr val="9DA7B3"/>
+                  <a:srgbClr val="57606A"/>
                 </a:solidFill>
                 <a:latin typeface="Microsoft JhengHei" pitchFamily="34" charset="0"/>
                 <a:ea typeface="Microsoft JhengHei" pitchFamily="34" charset="-122"/>
@@ -4831,7 +4831,7 @@
             <a:r>
               <a:rPr lang="en-US" sz="1150" dirty="0">
                 <a:solidFill>
-                  <a:srgbClr val="9DA7B3"/>
+                  <a:srgbClr val="57606A"/>
                 </a:solidFill>
                 <a:latin typeface="Microsoft JhengHei" pitchFamily="34" charset="0"/>
                 <a:ea typeface="Microsoft JhengHei" pitchFamily="34" charset="-122"/>
@@ -4860,11 +4860,11 @@
             </a:avLst>
           </a:prstGeom>
           <a:solidFill>
-            <a:srgbClr val="161B22"/>
+            <a:srgbClr val="F6F8FA"/>
           </a:solidFill>
           <a:ln w="9525">
             <a:solidFill>
-              <a:srgbClr val="30363D"/>
+              <a:srgbClr val="D0D7DE"/>
             </a:solidFill>
             <a:prstDash val="solid"/>
           </a:ln>
@@ -4897,7 +4897,7 @@
             <a:r>
               <a:rPr lang="en-US" sz="3000" b="1" dirty="0">
                 <a:solidFill>
-                  <a:srgbClr val="F59E0B"/>
+                  <a:srgbClr val="B45309"/>
                 </a:solidFill>
                 <a:latin typeface="Consolas" pitchFamily="34" charset="0"/>
                 <a:ea typeface="Consolas" pitchFamily="34" charset="-122"/>
@@ -4936,7 +4936,7 @@
             <a:r>
               <a:rPr lang="en-US" sz="1150" dirty="0">
                 <a:solidFill>
-                  <a:srgbClr val="9DA7B3"/>
+                  <a:srgbClr val="57606A"/>
                 </a:solidFill>
                 <a:latin typeface="Microsoft JhengHei" pitchFamily="34" charset="0"/>
                 <a:ea typeface="Microsoft JhengHei" pitchFamily="34" charset="-122"/>
@@ -4953,7 +4953,7 @@
             <a:r>
               <a:rPr lang="en-US" sz="1150" dirty="0">
                 <a:solidFill>
-                  <a:srgbClr val="9DA7B3"/>
+                  <a:srgbClr val="57606A"/>
                 </a:solidFill>
                 <a:latin typeface="Microsoft JhengHei" pitchFamily="34" charset="0"/>
                 <a:ea typeface="Microsoft JhengHei" pitchFamily="34" charset="-122"/>
@@ -4982,11 +4982,11 @@
             </a:avLst>
           </a:prstGeom>
           <a:solidFill>
-            <a:srgbClr val="161B22"/>
+            <a:srgbClr val="F6F8FA"/>
           </a:solidFill>
           <a:ln w="9525">
             <a:solidFill>
-              <a:srgbClr val="30363D"/>
+              <a:srgbClr val="D0D7DE"/>
             </a:solidFill>
             <a:prstDash val="solid"/>
           </a:ln>
@@ -5019,7 +5019,7 @@
             <a:r>
               <a:rPr lang="en-US" sz="3000" b="1" dirty="0">
                 <a:solidFill>
-                  <a:srgbClr val="22D3EE"/>
+                  <a:srgbClr val="0369A1"/>
                 </a:solidFill>
                 <a:latin typeface="Consolas" pitchFamily="34" charset="0"/>
                 <a:ea typeface="Consolas" pitchFamily="34" charset="-122"/>
@@ -5058,7 +5058,7 @@
             <a:r>
               <a:rPr lang="en-US" sz="1150" dirty="0">
                 <a:solidFill>
-                  <a:srgbClr val="9DA7B3"/>
+                  <a:srgbClr val="57606A"/>
                 </a:solidFill>
                 <a:latin typeface="Microsoft JhengHei" pitchFamily="34" charset="0"/>
                 <a:ea typeface="Microsoft JhengHei" pitchFamily="34" charset="-122"/>
@@ -5075,7 +5075,7 @@
             <a:r>
               <a:rPr lang="en-US" sz="1150" dirty="0">
                 <a:solidFill>
-                  <a:srgbClr val="9DA7B3"/>
+                  <a:srgbClr val="57606A"/>
                 </a:solidFill>
                 <a:latin typeface="Microsoft JhengHei" pitchFamily="34" charset="0"/>
                 <a:ea typeface="Microsoft JhengHei" pitchFamily="34" charset="-122"/>
@@ -5104,11 +5104,11 @@
             </a:avLst>
           </a:prstGeom>
           <a:solidFill>
-            <a:srgbClr val="161B22"/>
+            <a:srgbClr val="F6F8FA"/>
           </a:solidFill>
           <a:ln w="9525">
             <a:solidFill>
-              <a:srgbClr val="30363D"/>
+              <a:srgbClr val="D0D7DE"/>
             </a:solidFill>
             <a:prstDash val="solid"/>
           </a:ln>
@@ -5141,7 +5141,7 @@
             <a:r>
               <a:rPr lang="en-US" sz="3000" b="1" dirty="0">
                 <a:solidFill>
-                  <a:srgbClr val="22D3EE"/>
+                  <a:srgbClr val="0369A1"/>
                 </a:solidFill>
                 <a:latin typeface="Consolas" pitchFamily="34" charset="0"/>
                 <a:ea typeface="Consolas" pitchFamily="34" charset="-122"/>
@@ -5180,7 +5180,7 @@
             <a:r>
               <a:rPr lang="en-US" sz="1150" dirty="0">
                 <a:solidFill>
-                  <a:srgbClr val="9DA7B3"/>
+                  <a:srgbClr val="57606A"/>
                 </a:solidFill>
                 <a:latin typeface="Microsoft JhengHei" pitchFamily="34" charset="0"/>
                 <a:ea typeface="Microsoft JhengHei" pitchFamily="34" charset="-122"/>
@@ -5197,7 +5197,7 @@
             <a:r>
               <a:rPr lang="en-US" sz="1150" dirty="0">
                 <a:solidFill>
-                  <a:srgbClr val="9DA7B3"/>
+                  <a:srgbClr val="57606A"/>
                 </a:solidFill>
                 <a:latin typeface="Microsoft JhengHei" pitchFamily="34" charset="0"/>
                 <a:ea typeface="Microsoft JhengHei" pitchFamily="34" charset="-122"/>
@@ -5236,7 +5236,7 @@
             <a:r>
               <a:rPr lang="en-US" sz="1250" i="1" dirty="0">
                 <a:solidFill>
-                  <a:srgbClr val="7D8590"/>
+                  <a:srgbClr val="6E7781"/>
                 </a:solidFill>
                 <a:latin typeface="Microsoft JhengHei" pitchFamily="34" charset="0"/>
                 <a:ea typeface="Microsoft JhengHei" pitchFamily="34" charset="-122"/>
@@ -5262,7 +5262,7 @@
     <p:bg>
       <p:bgPr>
         <a:solidFill>
-          <a:srgbClr val="0D1117"/>
+          <a:srgbClr val="FFFFFF"/>
         </a:solidFill>
       </p:bgPr>
     </p:bg>
@@ -5297,7 +5297,7 @@
           <a:noFill/>
           <a:ln w="9525">
             <a:solidFill>
-              <a:srgbClr val="30363D"/>
+              <a:srgbClr val="D0D7DE"/>
             </a:solidFill>
             <a:prstDash val="solid"/>
           </a:ln>
@@ -5330,7 +5330,7 @@
             <a:r>
               <a:rPr lang="en-US" sz="900" b="1" dirty="0">
                 <a:solidFill>
-                  <a:srgbClr val="22D3EE"/>
+                  <a:srgbClr val="0369A1"/>
                 </a:solidFill>
                 <a:latin typeface="Consolas" pitchFamily="34" charset="0"/>
                 <a:ea typeface="Consolas" pitchFamily="34" charset="-122"/>
@@ -5344,7 +5344,7 @@
             <a:r>
               <a:rPr lang="en-US" sz="900" dirty="0">
                 <a:solidFill>
-                  <a:srgbClr val="7D8590"/>
+                  <a:srgbClr val="6E7781"/>
                 </a:solidFill>
                 <a:latin typeface="Consolas" pitchFamily="34" charset="0"/>
                 <a:ea typeface="Consolas" pitchFamily="34" charset="-122"/>
@@ -5383,7 +5383,7 @@
             <a:r>
               <a:rPr lang="en-US" sz="900" dirty="0">
                 <a:solidFill>
-                  <a:srgbClr val="7D8590"/>
+                  <a:srgbClr val="6E7781"/>
                 </a:solidFill>
                 <a:latin typeface="Consolas" pitchFamily="34" charset="0"/>
                 <a:ea typeface="Consolas" pitchFamily="34" charset="-122"/>
@@ -5422,7 +5422,7 @@
             <a:r>
               <a:rPr lang="en-US" sz="1100" b="1" spc="300" kern="0" dirty="0">
                 <a:solidFill>
-                  <a:srgbClr val="22D3EE"/>
+                  <a:srgbClr val="0369A1"/>
                 </a:solidFill>
                 <a:latin typeface="Consolas" pitchFamily="34" charset="0"/>
                 <a:ea typeface="Consolas" pitchFamily="34" charset="-122"/>
@@ -5461,7 +5461,7 @@
             <a:r>
               <a:rPr lang="en-US" sz="3000" b="1" dirty="0">
                 <a:solidFill>
-                  <a:srgbClr val="E6EDF3"/>
+                  <a:srgbClr val="1F2328"/>
                 </a:solidFill>
                 <a:latin typeface="Microsoft JhengHei" pitchFamily="34" charset="0"/>
                 <a:ea typeface="Microsoft JhengHei" pitchFamily="34" charset="-122"/>
@@ -5490,7 +5490,7 @@
           <a:noFill/>
           <a:ln w="31750">
             <a:solidFill>
-              <a:srgbClr val="22D3EE"/>
+              <a:srgbClr val="0369A1"/>
             </a:solidFill>
             <a:prstDash val="solid"/>
           </a:ln>
@@ -5513,11 +5513,11 @@
             </a:avLst>
           </a:prstGeom>
           <a:solidFill>
-            <a:srgbClr val="161B22"/>
+            <a:srgbClr val="F6F8FA"/>
           </a:solidFill>
           <a:ln w="9525">
             <a:solidFill>
-              <a:srgbClr val="30363D"/>
+              <a:srgbClr val="D0D7DE"/>
             </a:solidFill>
             <a:prstDash val="solid"/>
           </a:ln>
@@ -5550,7 +5550,7 @@
             <a:r>
               <a:rPr lang="en-US" sz="1400" b="1" dirty="0">
                 <a:solidFill>
-                  <a:srgbClr val="22D3EE"/>
+                  <a:srgbClr val="0369A1"/>
                 </a:solidFill>
                 <a:latin typeface="Consolas" pitchFamily="34" charset="0"/>
                 <a:ea typeface="Consolas" pitchFamily="34" charset="-122"/>
@@ -5589,7 +5589,7 @@
             <a:r>
               <a:rPr lang="en-US" sz="1300" dirty="0">
                 <a:solidFill>
-                  <a:srgbClr val="E6EDF3"/>
+                  <a:srgbClr val="1F2328"/>
                 </a:solidFill>
                 <a:latin typeface="Consolas" pitchFamily="34" charset="0"/>
                 <a:ea typeface="Consolas" pitchFamily="34" charset="-122"/>
@@ -5618,11 +5618,11 @@
             </a:avLst>
           </a:prstGeom>
           <a:solidFill>
-            <a:srgbClr val="161B22"/>
+            <a:srgbClr val="F6F8FA"/>
           </a:solidFill>
           <a:ln w="9525">
             <a:solidFill>
-              <a:srgbClr val="30363D"/>
+              <a:srgbClr val="D0D7DE"/>
             </a:solidFill>
             <a:prstDash val="solid"/>
           </a:ln>
@@ -5655,7 +5655,7 @@
             <a:r>
               <a:rPr lang="en-US" sz="1400" b="1" dirty="0">
                 <a:solidFill>
-                  <a:srgbClr val="22D3EE"/>
+                  <a:srgbClr val="0369A1"/>
                 </a:solidFill>
                 <a:latin typeface="Consolas" pitchFamily="34" charset="0"/>
                 <a:ea typeface="Consolas" pitchFamily="34" charset="-122"/>
@@ -5694,7 +5694,7 @@
             <a:r>
               <a:rPr lang="en-US" sz="1300" dirty="0">
                 <a:solidFill>
-                  <a:srgbClr val="E6EDF3"/>
+                  <a:srgbClr val="1F2328"/>
                 </a:solidFill>
                 <a:latin typeface="Consolas" pitchFamily="34" charset="0"/>
                 <a:ea typeface="Consolas" pitchFamily="34" charset="-122"/>
@@ -5723,11 +5723,11 @@
             </a:avLst>
           </a:prstGeom>
           <a:solidFill>
-            <a:srgbClr val="161B22"/>
+            <a:srgbClr val="F6F8FA"/>
           </a:solidFill>
           <a:ln w="9525">
             <a:solidFill>
-              <a:srgbClr val="30363D"/>
+              <a:srgbClr val="D0D7DE"/>
             </a:solidFill>
             <a:prstDash val="solid"/>
           </a:ln>
@@ -5760,7 +5760,7 @@
             <a:r>
               <a:rPr lang="en-US" sz="1400" b="1" dirty="0">
                 <a:solidFill>
-                  <a:srgbClr val="22D3EE"/>
+                  <a:srgbClr val="0369A1"/>
                 </a:solidFill>
                 <a:latin typeface="Consolas" pitchFamily="34" charset="0"/>
                 <a:ea typeface="Consolas" pitchFamily="34" charset="-122"/>
@@ -5799,7 +5799,7 @@
             <a:r>
               <a:rPr lang="en-US" sz="1300" dirty="0">
                 <a:solidFill>
-                  <a:srgbClr val="E6EDF3"/>
+                  <a:srgbClr val="1F2328"/>
                 </a:solidFill>
                 <a:latin typeface="Consolas" pitchFamily="34" charset="0"/>
                 <a:ea typeface="Consolas" pitchFamily="34" charset="-122"/>
@@ -5828,11 +5828,11 @@
             </a:avLst>
           </a:prstGeom>
           <a:solidFill>
-            <a:srgbClr val="161B22"/>
+            <a:srgbClr val="F6F8FA"/>
           </a:solidFill>
           <a:ln w="9525">
             <a:solidFill>
-              <a:srgbClr val="30363D"/>
+              <a:srgbClr val="D0D7DE"/>
             </a:solidFill>
             <a:prstDash val="solid"/>
           </a:ln>
@@ -5865,7 +5865,7 @@
             <a:r>
               <a:rPr lang="en-US" sz="1400" b="1" dirty="0">
                 <a:solidFill>
-                  <a:srgbClr val="22D3EE"/>
+                  <a:srgbClr val="0369A1"/>
                 </a:solidFill>
                 <a:latin typeface="Consolas" pitchFamily="34" charset="0"/>
                 <a:ea typeface="Consolas" pitchFamily="34" charset="-122"/>
@@ -5904,7 +5904,7 @@
             <a:r>
               <a:rPr lang="en-US" sz="1300" dirty="0">
                 <a:solidFill>
-                  <a:srgbClr val="E6EDF3"/>
+                  <a:srgbClr val="1F2328"/>
                 </a:solidFill>
                 <a:latin typeface="Consolas" pitchFamily="34" charset="0"/>
                 <a:ea typeface="Consolas" pitchFamily="34" charset="-122"/>
@@ -5933,11 +5933,11 @@
             </a:avLst>
           </a:prstGeom>
           <a:solidFill>
-            <a:srgbClr val="161B22"/>
+            <a:srgbClr val="F6F8FA"/>
           </a:solidFill>
           <a:ln w="9525">
             <a:solidFill>
-              <a:srgbClr val="30363D"/>
+              <a:srgbClr val="D0D7DE"/>
             </a:solidFill>
             <a:prstDash val="solid"/>
           </a:ln>
@@ -5970,7 +5970,7 @@
             <a:r>
               <a:rPr lang="en-US" sz="1400" b="1" dirty="0">
                 <a:solidFill>
-                  <a:srgbClr val="22D3EE"/>
+                  <a:srgbClr val="0369A1"/>
                 </a:solidFill>
                 <a:latin typeface="Consolas" pitchFamily="34" charset="0"/>
                 <a:ea typeface="Consolas" pitchFamily="34" charset="-122"/>
@@ -6009,7 +6009,7 @@
             <a:r>
               <a:rPr lang="en-US" sz="1300" dirty="0">
                 <a:solidFill>
-                  <a:srgbClr val="E6EDF3"/>
+                  <a:srgbClr val="1F2328"/>
                 </a:solidFill>
                 <a:latin typeface="Consolas" pitchFamily="34" charset="0"/>
                 <a:ea typeface="Consolas" pitchFamily="34" charset="-122"/>
@@ -6035,7 +6035,7 @@
     <p:bg>
       <p:bgPr>
         <a:solidFill>
-          <a:srgbClr val="0D1117"/>
+          <a:srgbClr val="FFFFFF"/>
         </a:solidFill>
       </p:bgPr>
     </p:bg>
@@ -6070,7 +6070,7 @@
           <a:noFill/>
           <a:ln w="9525">
             <a:solidFill>
-              <a:srgbClr val="30363D"/>
+              <a:srgbClr val="D0D7DE"/>
             </a:solidFill>
             <a:prstDash val="solid"/>
           </a:ln>
@@ -6103,7 +6103,7 @@
             <a:r>
               <a:rPr lang="en-US" sz="900" b="1" dirty="0">
                 <a:solidFill>
-                  <a:srgbClr val="22D3EE"/>
+                  <a:srgbClr val="0369A1"/>
                 </a:solidFill>
                 <a:latin typeface="Consolas" pitchFamily="34" charset="0"/>
                 <a:ea typeface="Consolas" pitchFamily="34" charset="-122"/>
@@ -6117,7 +6117,7 @@
             <a:r>
               <a:rPr lang="en-US" sz="900" dirty="0">
                 <a:solidFill>
-                  <a:srgbClr val="7D8590"/>
+                  <a:srgbClr val="6E7781"/>
                 </a:solidFill>
                 <a:latin typeface="Consolas" pitchFamily="34" charset="0"/>
                 <a:ea typeface="Consolas" pitchFamily="34" charset="-122"/>
@@ -6156,7 +6156,7 @@
             <a:r>
               <a:rPr lang="en-US" sz="900" dirty="0">
                 <a:solidFill>
-                  <a:srgbClr val="7D8590"/>
+                  <a:srgbClr val="6E7781"/>
                 </a:solidFill>
                 <a:latin typeface="Consolas" pitchFamily="34" charset="0"/>
                 <a:ea typeface="Consolas" pitchFamily="34" charset="-122"/>
@@ -6195,7 +6195,7 @@
             <a:r>
               <a:rPr lang="en-US" sz="1100" b="1" spc="300" kern="0" dirty="0">
                 <a:solidFill>
-                  <a:srgbClr val="22D3EE"/>
+                  <a:srgbClr val="0369A1"/>
                 </a:solidFill>
                 <a:latin typeface="Consolas" pitchFamily="34" charset="0"/>
                 <a:ea typeface="Consolas" pitchFamily="34" charset="-122"/>
@@ -6234,7 +6234,7 @@
             <a:r>
               <a:rPr lang="en-US" sz="3000" b="1" dirty="0">
                 <a:solidFill>
-                  <a:srgbClr val="E6EDF3"/>
+                  <a:srgbClr val="1F2328"/>
                 </a:solidFill>
                 <a:latin typeface="Microsoft JhengHei" pitchFamily="34" charset="0"/>
                 <a:ea typeface="Microsoft JhengHei" pitchFamily="34" charset="-122"/>
@@ -6263,7 +6263,7 @@
           <a:noFill/>
           <a:ln w="31750">
             <a:solidFill>
-              <a:srgbClr val="22D3EE"/>
+              <a:srgbClr val="0369A1"/>
             </a:solidFill>
             <a:prstDash val="solid"/>
           </a:ln>
@@ -6296,7 +6296,7 @@
             <a:r>
               <a:rPr lang="en-US" sz="1400" dirty="0">
                 <a:solidFill>
-                  <a:srgbClr val="9DA7B3"/>
+                  <a:srgbClr val="57606A"/>
                 </a:solidFill>
                 <a:latin typeface="Microsoft JhengHei" pitchFamily="34" charset="0"/>
                 <a:ea typeface="Microsoft JhengHei" pitchFamily="34" charset="-122"/>
@@ -6325,11 +6325,11 @@
             </a:avLst>
           </a:prstGeom>
           <a:solidFill>
-            <a:srgbClr val="161B22"/>
+            <a:srgbClr val="F6F8FA"/>
           </a:solidFill>
           <a:ln w="15875">
             <a:solidFill>
-              <a:srgbClr val="F59E0B"/>
+              <a:srgbClr val="B45309"/>
             </a:solidFill>
             <a:prstDash val="solid"/>
           </a:ln>
@@ -6362,7 +6362,7 @@
             <a:r>
               <a:rPr lang="en-US" sz="1400" b="1" dirty="0">
                 <a:solidFill>
-                  <a:srgbClr val="F59E0B"/>
+                  <a:srgbClr val="B45309"/>
                 </a:solidFill>
                 <a:latin typeface="Consolas" pitchFamily="34" charset="0"/>
                 <a:ea typeface="Consolas" pitchFamily="34" charset="-122"/>
@@ -6401,7 +6401,7 @@
             <a:r>
               <a:rPr lang="en-US" sz="1100" dirty="0">
                 <a:solidFill>
-                  <a:srgbClr val="9DA7B3"/>
+                  <a:srgbClr val="57606A"/>
                 </a:solidFill>
                 <a:latin typeface="Microsoft JhengHei" pitchFamily="34" charset="0"/>
                 <a:ea typeface="Microsoft JhengHei" pitchFamily="34" charset="-122"/>
@@ -6440,7 +6440,7 @@
             <a:r>
               <a:rPr lang="en-US" sz="1800" dirty="0">
                 <a:solidFill>
-                  <a:srgbClr val="7D8590"/>
+                  <a:srgbClr val="6E7781"/>
                 </a:solidFill>
                 <a:latin typeface="Consolas" pitchFamily="34" charset="0"/>
                 <a:ea typeface="Consolas" pitchFamily="34" charset="-122"/>
@@ -6469,11 +6469,11 @@
             </a:avLst>
           </a:prstGeom>
           <a:solidFill>
-            <a:srgbClr val="161B22"/>
+            <a:srgbClr val="F6F8FA"/>
           </a:solidFill>
           <a:ln w="15875">
             <a:solidFill>
-              <a:srgbClr val="22D3EE"/>
+              <a:srgbClr val="0369A1"/>
             </a:solidFill>
             <a:prstDash val="solid"/>
           </a:ln>
@@ -6506,7 +6506,7 @@
             <a:r>
               <a:rPr lang="en-US" sz="1400" b="1" dirty="0">
                 <a:solidFill>
-                  <a:srgbClr val="22D3EE"/>
+                  <a:srgbClr val="0369A1"/>
                 </a:solidFill>
                 <a:latin typeface="Consolas" pitchFamily="34" charset="0"/>
                 <a:ea typeface="Consolas" pitchFamily="34" charset="-122"/>
@@ -6545,7 +6545,7 @@
             <a:r>
               <a:rPr lang="en-US" sz="1100" dirty="0">
                 <a:solidFill>
-                  <a:srgbClr val="9DA7B3"/>
+                  <a:srgbClr val="57606A"/>
                 </a:solidFill>
                 <a:latin typeface="Microsoft JhengHei" pitchFamily="34" charset="0"/>
                 <a:ea typeface="Microsoft JhengHei" pitchFamily="34" charset="-122"/>
@@ -6584,7 +6584,7 @@
             <a:r>
               <a:rPr lang="en-US" sz="1800" dirty="0">
                 <a:solidFill>
-                  <a:srgbClr val="7D8590"/>
+                  <a:srgbClr val="6E7781"/>
                 </a:solidFill>
                 <a:latin typeface="Consolas" pitchFamily="34" charset="0"/>
                 <a:ea typeface="Consolas" pitchFamily="34" charset="-122"/>
@@ -6613,11 +6613,11 @@
             </a:avLst>
           </a:prstGeom>
           <a:solidFill>
-            <a:srgbClr val="161B22"/>
+            <a:srgbClr val="F6F8FA"/>
           </a:solidFill>
           <a:ln w="15875">
             <a:solidFill>
-              <a:srgbClr val="22D3EE"/>
+              <a:srgbClr val="0369A1"/>
             </a:solidFill>
             <a:prstDash val="solid"/>
           </a:ln>
@@ -6650,7 +6650,7 @@
             <a:r>
               <a:rPr lang="en-US" sz="1400" b="1" dirty="0">
                 <a:solidFill>
-                  <a:srgbClr val="22D3EE"/>
+                  <a:srgbClr val="0369A1"/>
                 </a:solidFill>
                 <a:latin typeface="Consolas" pitchFamily="34" charset="0"/>
                 <a:ea typeface="Consolas" pitchFamily="34" charset="-122"/>
@@ -6689,7 +6689,7 @@
             <a:r>
               <a:rPr lang="en-US" sz="1100" dirty="0">
                 <a:solidFill>
-                  <a:srgbClr val="9DA7B3"/>
+                  <a:srgbClr val="57606A"/>
                 </a:solidFill>
                 <a:latin typeface="Microsoft JhengHei" pitchFamily="34" charset="0"/>
                 <a:ea typeface="Microsoft JhengHei" pitchFamily="34" charset="-122"/>
@@ -6728,7 +6728,7 @@
             <a:r>
               <a:rPr lang="en-US" sz="1800" dirty="0">
                 <a:solidFill>
-                  <a:srgbClr val="7D8590"/>
+                  <a:srgbClr val="6E7781"/>
                 </a:solidFill>
                 <a:latin typeface="Consolas" pitchFamily="34" charset="0"/>
                 <a:ea typeface="Consolas" pitchFamily="34" charset="-122"/>
@@ -6757,11 +6757,11 @@
             </a:avLst>
           </a:prstGeom>
           <a:solidFill>
-            <a:srgbClr val="161B22"/>
+            <a:srgbClr val="F6F8FA"/>
           </a:solidFill>
           <a:ln w="15875">
             <a:solidFill>
-              <a:srgbClr val="22D3EE"/>
+              <a:srgbClr val="0369A1"/>
             </a:solidFill>
             <a:prstDash val="solid"/>
           </a:ln>
@@ -6794,7 +6794,7 @@
             <a:r>
               <a:rPr lang="en-US" sz="1400" b="1" dirty="0">
                 <a:solidFill>
-                  <a:srgbClr val="22D3EE"/>
+                  <a:srgbClr val="0369A1"/>
                 </a:solidFill>
                 <a:latin typeface="Consolas" pitchFamily="34" charset="0"/>
                 <a:ea typeface="Consolas" pitchFamily="34" charset="-122"/>
@@ -6833,7 +6833,7 @@
             <a:r>
               <a:rPr lang="en-US" sz="1100" dirty="0">
                 <a:solidFill>
-                  <a:srgbClr val="9DA7B3"/>
+                  <a:srgbClr val="57606A"/>
                 </a:solidFill>
                 <a:latin typeface="Microsoft JhengHei" pitchFamily="34" charset="0"/>
                 <a:ea typeface="Microsoft JhengHei" pitchFamily="34" charset="-122"/>
@@ -6872,7 +6872,7 @@
             <a:r>
               <a:rPr lang="en-US" sz="1800" dirty="0">
                 <a:solidFill>
-                  <a:srgbClr val="7D8590"/>
+                  <a:srgbClr val="6E7781"/>
                 </a:solidFill>
                 <a:latin typeface="Consolas" pitchFamily="34" charset="0"/>
                 <a:ea typeface="Consolas" pitchFamily="34" charset="-122"/>
@@ -6901,11 +6901,11 @@
             </a:avLst>
           </a:prstGeom>
           <a:solidFill>
-            <a:srgbClr val="161B22"/>
+            <a:srgbClr val="F6F8FA"/>
           </a:solidFill>
           <a:ln w="15875">
             <a:solidFill>
-              <a:srgbClr val="F59E0B"/>
+              <a:srgbClr val="B45309"/>
             </a:solidFill>
             <a:prstDash val="solid"/>
           </a:ln>
@@ -6938,7 +6938,7 @@
             <a:r>
               <a:rPr lang="en-US" sz="1400" b="1" dirty="0">
                 <a:solidFill>
-                  <a:srgbClr val="F59E0B"/>
+                  <a:srgbClr val="B45309"/>
                 </a:solidFill>
                 <a:latin typeface="Consolas" pitchFamily="34" charset="0"/>
                 <a:ea typeface="Consolas" pitchFamily="34" charset="-122"/>
@@ -6977,7 +6977,7 @@
             <a:r>
               <a:rPr lang="en-US" sz="1100" dirty="0">
                 <a:solidFill>
-                  <a:srgbClr val="9DA7B3"/>
+                  <a:srgbClr val="57606A"/>
                 </a:solidFill>
                 <a:latin typeface="Microsoft JhengHei" pitchFamily="34" charset="0"/>
                 <a:ea typeface="Microsoft JhengHei" pitchFamily="34" charset="-122"/>
@@ -7022,7 +7022,7 @@
             <a:r>
               <a:rPr lang="en-US" sz="1400" b="1" dirty="0">
                 <a:solidFill>
-                  <a:srgbClr val="22D3EE"/>
+                  <a:srgbClr val="0369A1"/>
                 </a:solidFill>
                 <a:latin typeface="Consolas" pitchFamily="34" charset="0"/>
                 <a:ea typeface="Consolas" pitchFamily="34" charset="-122"/>
@@ -7042,7 +7042,7 @@
             <a:r>
               <a:rPr lang="en-US" sz="1400" b="1" dirty="0">
                 <a:solidFill>
-                  <a:srgbClr val="E6EDF3"/>
+                  <a:srgbClr val="1F2328"/>
                 </a:solidFill>
                 <a:latin typeface="Microsoft JhengHei" pitchFamily="34" charset="0"/>
                 <a:ea typeface="Microsoft JhengHei" pitchFamily="34" charset="-122"/>
@@ -7062,7 +7062,7 @@
             <a:r>
               <a:rPr lang="en-US" sz="1400" dirty="0">
                 <a:solidFill>
-                  <a:srgbClr val="E6EDF3"/>
+                  <a:srgbClr val="1F2328"/>
                 </a:solidFill>
                 <a:latin typeface="Microsoft JhengHei" pitchFamily="34" charset="0"/>
                 <a:ea typeface="Microsoft JhengHei" pitchFamily="34" charset="-122"/>
@@ -7085,7 +7085,7 @@
             <a:r>
               <a:rPr lang="en-US" sz="1400" b="1" dirty="0">
                 <a:solidFill>
-                  <a:srgbClr val="22D3EE"/>
+                  <a:srgbClr val="0369A1"/>
                 </a:solidFill>
                 <a:latin typeface="Consolas" pitchFamily="34" charset="0"/>
                 <a:ea typeface="Consolas" pitchFamily="34" charset="-122"/>
@@ -7105,7 +7105,7 @@
             <a:r>
               <a:rPr lang="en-US" sz="1400" b="1" dirty="0">
                 <a:solidFill>
-                  <a:srgbClr val="E6EDF3"/>
+                  <a:srgbClr val="1F2328"/>
                 </a:solidFill>
                 <a:latin typeface="Microsoft JhengHei" pitchFamily="34" charset="0"/>
                 <a:ea typeface="Microsoft JhengHei" pitchFamily="34" charset="-122"/>
@@ -7125,7 +7125,7 @@
             <a:r>
               <a:rPr lang="en-US" sz="1400" dirty="0">
                 <a:solidFill>
-                  <a:srgbClr val="E6EDF3"/>
+                  <a:srgbClr val="1F2328"/>
                 </a:solidFill>
                 <a:latin typeface="Microsoft JhengHei" pitchFamily="34" charset="0"/>
                 <a:ea typeface="Microsoft JhengHei" pitchFamily="34" charset="-122"/>
@@ -7148,7 +7148,7 @@
             <a:r>
               <a:rPr lang="en-US" sz="1400" b="1" dirty="0">
                 <a:solidFill>
-                  <a:srgbClr val="22D3EE"/>
+                  <a:srgbClr val="0369A1"/>
                 </a:solidFill>
                 <a:latin typeface="Consolas" pitchFamily="34" charset="0"/>
                 <a:ea typeface="Consolas" pitchFamily="34" charset="-122"/>
@@ -7168,7 +7168,7 @@
             <a:r>
               <a:rPr lang="en-US" sz="1400" dirty="0">
                 <a:solidFill>
-                  <a:srgbClr val="E6EDF3"/>
+                  <a:srgbClr val="1F2328"/>
                 </a:solidFill>
                 <a:latin typeface="Microsoft JhengHei" pitchFamily="34" charset="0"/>
                 <a:ea typeface="Microsoft JhengHei" pitchFamily="34" charset="-122"/>
@@ -7188,7 +7188,7 @@
             <a:r>
               <a:rPr lang="en-US" sz="1400" b="1" dirty="0">
                 <a:solidFill>
-                  <a:srgbClr val="E6EDF3"/>
+                  <a:srgbClr val="1F2328"/>
                 </a:solidFill>
                 <a:latin typeface="Microsoft JhengHei" pitchFamily="34" charset="0"/>
                 <a:ea typeface="Microsoft JhengHei" pitchFamily="34" charset="-122"/>
@@ -7208,7 +7208,7 @@
             <a:r>
               <a:rPr lang="en-US" sz="1400" dirty="0">
                 <a:solidFill>
-                  <a:srgbClr val="E6EDF3"/>
+                  <a:srgbClr val="1F2328"/>
                 </a:solidFill>
                 <a:latin typeface="Microsoft JhengHei" pitchFamily="34" charset="0"/>
                 <a:ea typeface="Microsoft JhengHei" pitchFamily="34" charset="-122"/>
@@ -7231,7 +7231,7 @@
             <a:r>
               <a:rPr lang="en-US" sz="1400" b="1" dirty="0">
                 <a:solidFill>
-                  <a:srgbClr val="22D3EE"/>
+                  <a:srgbClr val="0369A1"/>
                 </a:solidFill>
                 <a:latin typeface="Consolas" pitchFamily="34" charset="0"/>
                 <a:ea typeface="Consolas" pitchFamily="34" charset="-122"/>
@@ -7251,7 +7251,7 @@
             <a:r>
               <a:rPr lang="en-US" sz="1400" b="1" dirty="0">
                 <a:solidFill>
-                  <a:srgbClr val="E6EDF3"/>
+                  <a:srgbClr val="1F2328"/>
                 </a:solidFill>
                 <a:latin typeface="Microsoft JhengHei" pitchFamily="34" charset="0"/>
                 <a:ea typeface="Microsoft JhengHei" pitchFamily="34" charset="-122"/>
@@ -7271,7 +7271,7 @@
             <a:r>
               <a:rPr lang="en-US" sz="1400" dirty="0">
                 <a:solidFill>
-                  <a:srgbClr val="E6EDF3"/>
+                  <a:srgbClr val="1F2328"/>
                 </a:solidFill>
                 <a:latin typeface="Microsoft JhengHei" pitchFamily="34" charset="0"/>
                 <a:ea typeface="Microsoft JhengHei" pitchFamily="34" charset="-122"/>
@@ -7297,7 +7297,7 @@
     <p:bg>
       <p:bgPr>
         <a:solidFill>
-          <a:srgbClr val="0D1117"/>
+          <a:srgbClr val="FFFFFF"/>
         </a:solidFill>
       </p:bgPr>
     </p:bg>
@@ -7332,7 +7332,7 @@
           <a:noFill/>
           <a:ln w="9525">
             <a:solidFill>
-              <a:srgbClr val="30363D"/>
+              <a:srgbClr val="D0D7DE"/>
             </a:solidFill>
             <a:prstDash val="solid"/>
           </a:ln>
@@ -7365,7 +7365,7 @@
             <a:r>
               <a:rPr lang="en-US" sz="900" b="1" dirty="0">
                 <a:solidFill>
-                  <a:srgbClr val="22D3EE"/>
+                  <a:srgbClr val="0369A1"/>
                 </a:solidFill>
                 <a:latin typeface="Consolas" pitchFamily="34" charset="0"/>
                 <a:ea typeface="Consolas" pitchFamily="34" charset="-122"/>
@@ -7379,7 +7379,7 @@
             <a:r>
               <a:rPr lang="en-US" sz="900" dirty="0">
                 <a:solidFill>
-                  <a:srgbClr val="7D8590"/>
+                  <a:srgbClr val="6E7781"/>
                 </a:solidFill>
                 <a:latin typeface="Consolas" pitchFamily="34" charset="0"/>
                 <a:ea typeface="Consolas" pitchFamily="34" charset="-122"/>
@@ -7418,7 +7418,7 @@
             <a:r>
               <a:rPr lang="en-US" sz="900" dirty="0">
                 <a:solidFill>
-                  <a:srgbClr val="7D8590"/>
+                  <a:srgbClr val="6E7781"/>
                 </a:solidFill>
                 <a:latin typeface="Consolas" pitchFamily="34" charset="0"/>
                 <a:ea typeface="Consolas" pitchFamily="34" charset="-122"/>
@@ -7457,7 +7457,7 @@
             <a:r>
               <a:rPr lang="en-US" sz="1100" b="1" spc="300" kern="0" dirty="0">
                 <a:solidFill>
-                  <a:srgbClr val="22D3EE"/>
+                  <a:srgbClr val="0369A1"/>
                 </a:solidFill>
                 <a:latin typeface="Consolas" pitchFamily="34" charset="0"/>
                 <a:ea typeface="Consolas" pitchFamily="34" charset="-122"/>
@@ -7496,7 +7496,7 @@
             <a:r>
               <a:rPr lang="en-US" sz="3000" b="1" dirty="0">
                 <a:solidFill>
-                  <a:srgbClr val="E6EDF3"/>
+                  <a:srgbClr val="1F2328"/>
                 </a:solidFill>
                 <a:latin typeface="Microsoft JhengHei" pitchFamily="34" charset="0"/>
                 <a:ea typeface="Microsoft JhengHei" pitchFamily="34" charset="-122"/>
@@ -7525,7 +7525,7 @@
           <a:noFill/>
           <a:ln w="31750">
             <a:solidFill>
-              <a:srgbClr val="22D3EE"/>
+              <a:srgbClr val="0369A1"/>
             </a:solidFill>
             <a:prstDash val="solid"/>
           </a:ln>
@@ -7558,7 +7558,7 @@
             <a:r>
               <a:rPr lang="en-US" sz="1400" b="1" dirty="0">
                 <a:solidFill>
-                  <a:srgbClr val="F59E0B"/>
+                  <a:srgbClr val="B45309"/>
                 </a:solidFill>
                 <a:latin typeface="Microsoft JhengHei" pitchFamily="34" charset="0"/>
                 <a:ea typeface="Microsoft JhengHei" pitchFamily="34" charset="-122"/>
@@ -7600,7 +7600,7 @@
             <a:r>
               <a:rPr lang="en-US" sz="1400" dirty="0">
                 <a:solidFill>
-                  <a:srgbClr val="E6EDF3"/>
+                  <a:srgbClr val="1F2328"/>
                 </a:solidFill>
                 <a:latin typeface="Microsoft JhengHei" pitchFamily="34" charset="0"/>
                 <a:ea typeface="Microsoft JhengHei" pitchFamily="34" charset="-122"/>
@@ -7629,7 +7629,7 @@
           <a:noFill/>
           <a:ln w="6350">
             <a:solidFill>
-              <a:srgbClr val="30363D"/>
+              <a:srgbClr val="D0D7DE"/>
             </a:solidFill>
             <a:prstDash val="solid"/>
           </a:ln>
@@ -7662,7 +7662,7 @@
             <a:r>
               <a:rPr lang="en-US" sz="1400" b="1" dirty="0">
                 <a:solidFill>
-                  <a:srgbClr val="F59E0B"/>
+                  <a:srgbClr val="B45309"/>
                 </a:solidFill>
                 <a:latin typeface="Microsoft JhengHei" pitchFamily="34" charset="0"/>
                 <a:ea typeface="Microsoft JhengHei" pitchFamily="34" charset="-122"/>
@@ -7704,7 +7704,7 @@
             <a:r>
               <a:rPr lang="en-US" sz="1400" dirty="0">
                 <a:solidFill>
-                  <a:srgbClr val="E6EDF3"/>
+                  <a:srgbClr val="1F2328"/>
                 </a:solidFill>
                 <a:latin typeface="Microsoft JhengHei" pitchFamily="34" charset="0"/>
                 <a:ea typeface="Microsoft JhengHei" pitchFamily="34" charset="-122"/>
@@ -7733,7 +7733,7 @@
           <a:noFill/>
           <a:ln w="6350">
             <a:solidFill>
-              <a:srgbClr val="30363D"/>
+              <a:srgbClr val="D0D7DE"/>
             </a:solidFill>
             <a:prstDash val="solid"/>
           </a:ln>
@@ -7766,7 +7766,7 @@
             <a:r>
               <a:rPr lang="en-US" sz="1400" b="1" dirty="0">
                 <a:solidFill>
-                  <a:srgbClr val="F59E0B"/>
+                  <a:srgbClr val="B45309"/>
                 </a:solidFill>
                 <a:latin typeface="Microsoft JhengHei" pitchFamily="34" charset="0"/>
                 <a:ea typeface="Microsoft JhengHei" pitchFamily="34" charset="-122"/>
@@ -7808,7 +7808,7 @@
             <a:r>
               <a:rPr lang="en-US" sz="1400" dirty="0">
                 <a:solidFill>
-                  <a:srgbClr val="E6EDF3"/>
+                  <a:srgbClr val="1F2328"/>
                 </a:solidFill>
                 <a:latin typeface="Microsoft JhengHei" pitchFamily="34" charset="0"/>
                 <a:ea typeface="Microsoft JhengHei" pitchFamily="34" charset="-122"/>
@@ -7837,7 +7837,7 @@
           <a:noFill/>
           <a:ln w="6350">
             <a:solidFill>
-              <a:srgbClr val="30363D"/>
+              <a:srgbClr val="D0D7DE"/>
             </a:solidFill>
             <a:prstDash val="solid"/>
           </a:ln>
@@ -7870,7 +7870,7 @@
             <a:r>
               <a:rPr lang="en-US" sz="1400" b="1" dirty="0">
                 <a:solidFill>
-                  <a:srgbClr val="F59E0B"/>
+                  <a:srgbClr val="B45309"/>
                 </a:solidFill>
                 <a:latin typeface="Microsoft JhengHei" pitchFamily="34" charset="0"/>
                 <a:ea typeface="Microsoft JhengHei" pitchFamily="34" charset="-122"/>
@@ -7912,7 +7912,7 @@
             <a:r>
               <a:rPr lang="en-US" sz="1400" dirty="0">
                 <a:solidFill>
-                  <a:srgbClr val="E6EDF3"/>
+                  <a:srgbClr val="1F2328"/>
                 </a:solidFill>
                 <a:latin typeface="Microsoft JhengHei" pitchFamily="34" charset="0"/>
                 <a:ea typeface="Microsoft JhengHei" pitchFamily="34" charset="-122"/>
@@ -7941,7 +7941,7 @@
           <a:noFill/>
           <a:ln w="6350">
             <a:solidFill>
-              <a:srgbClr val="30363D"/>
+              <a:srgbClr val="D0D7DE"/>
             </a:solidFill>
             <a:prstDash val="solid"/>
           </a:ln>
@@ -7974,7 +7974,7 @@
             <a:r>
               <a:rPr lang="en-US" sz="1400" b="1" dirty="0">
                 <a:solidFill>
-                  <a:srgbClr val="F59E0B"/>
+                  <a:srgbClr val="B45309"/>
                 </a:solidFill>
                 <a:latin typeface="Microsoft JhengHei" pitchFamily="34" charset="0"/>
                 <a:ea typeface="Microsoft JhengHei" pitchFamily="34" charset="-122"/>
@@ -8016,7 +8016,7 @@
             <a:r>
               <a:rPr lang="en-US" sz="1400" dirty="0">
                 <a:solidFill>
-                  <a:srgbClr val="E6EDF3"/>
+                  <a:srgbClr val="1F2328"/>
                 </a:solidFill>
                 <a:latin typeface="Microsoft JhengHei" pitchFamily="34" charset="0"/>
                 <a:ea typeface="Microsoft JhengHei" pitchFamily="34" charset="-122"/>
@@ -8042,7 +8042,7 @@
     <p:bg>
       <p:bgPr>
         <a:solidFill>
-          <a:srgbClr val="0D1117"/>
+          <a:srgbClr val="FFFFFF"/>
         </a:solidFill>
       </p:bgPr>
     </p:bg>
@@ -8077,7 +8077,7 @@
           <a:noFill/>
           <a:ln w="9525">
             <a:solidFill>
-              <a:srgbClr val="30363D"/>
+              <a:srgbClr val="D0D7DE"/>
             </a:solidFill>
             <a:prstDash val="solid"/>
           </a:ln>
@@ -8110,7 +8110,7 @@
             <a:r>
               <a:rPr lang="en-US" sz="900" b="1" dirty="0">
                 <a:solidFill>
-                  <a:srgbClr val="22D3EE"/>
+                  <a:srgbClr val="0369A1"/>
                 </a:solidFill>
                 <a:latin typeface="Consolas" pitchFamily="34" charset="0"/>
                 <a:ea typeface="Consolas" pitchFamily="34" charset="-122"/>
@@ -8124,7 +8124,7 @@
             <a:r>
               <a:rPr lang="en-US" sz="900" dirty="0">
                 <a:solidFill>
-                  <a:srgbClr val="7D8590"/>
+                  <a:srgbClr val="6E7781"/>
                 </a:solidFill>
                 <a:latin typeface="Consolas" pitchFamily="34" charset="0"/>
                 <a:ea typeface="Consolas" pitchFamily="34" charset="-122"/>
@@ -8163,7 +8163,7 @@
             <a:r>
               <a:rPr lang="en-US" sz="900" dirty="0">
                 <a:solidFill>
-                  <a:srgbClr val="7D8590"/>
+                  <a:srgbClr val="6E7781"/>
                 </a:solidFill>
                 <a:latin typeface="Consolas" pitchFamily="34" charset="0"/>
                 <a:ea typeface="Consolas" pitchFamily="34" charset="-122"/>
@@ -8202,7 +8202,7 @@
             <a:r>
               <a:rPr lang="en-US" sz="1100" b="1" spc="300" kern="0" dirty="0">
                 <a:solidFill>
-                  <a:srgbClr val="22D3EE"/>
+                  <a:srgbClr val="0369A1"/>
                 </a:solidFill>
                 <a:latin typeface="Consolas" pitchFamily="34" charset="0"/>
                 <a:ea typeface="Consolas" pitchFamily="34" charset="-122"/>
@@ -8241,7 +8241,7 @@
             <a:r>
               <a:rPr lang="en-US" sz="3000" b="1" dirty="0">
                 <a:solidFill>
-                  <a:srgbClr val="E6EDF3"/>
+                  <a:srgbClr val="1F2328"/>
                 </a:solidFill>
                 <a:latin typeface="Microsoft JhengHei" pitchFamily="34" charset="0"/>
                 <a:ea typeface="Microsoft JhengHei" pitchFamily="34" charset="-122"/>
@@ -8270,7 +8270,7 @@
           <a:noFill/>
           <a:ln w="31750">
             <a:solidFill>
-              <a:srgbClr val="22D3EE"/>
+              <a:srgbClr val="0369A1"/>
             </a:solidFill>
             <a:prstDash val="solid"/>
           </a:ln>
@@ -8303,7 +8303,7 @@
             <a:r>
               <a:rPr lang="en-US" sz="1400" dirty="0">
                 <a:solidFill>
-                  <a:srgbClr val="9DA7B3"/>
+                  <a:srgbClr val="57606A"/>
                 </a:solidFill>
                 <a:latin typeface="Microsoft JhengHei" pitchFamily="34" charset="0"/>
                 <a:ea typeface="Microsoft JhengHei" pitchFamily="34" charset="-122"/>
@@ -8348,7 +8348,7 @@
             <a:r>
               <a:rPr lang="en-US" sz="1400" b="1" dirty="0">
                 <a:solidFill>
-                  <a:srgbClr val="22D3EE"/>
+                  <a:srgbClr val="0369A1"/>
                 </a:solidFill>
                 <a:latin typeface="Consolas" pitchFamily="34" charset="0"/>
                 <a:ea typeface="Consolas" pitchFamily="34" charset="-122"/>
@@ -8368,7 +8368,7 @@
             <a:r>
               <a:rPr lang="en-US" sz="1400" b="1" dirty="0">
                 <a:solidFill>
-                  <a:srgbClr val="E6EDF3"/>
+                  <a:srgbClr val="1F2328"/>
                 </a:solidFill>
                 <a:latin typeface="Microsoft JhengHei" pitchFamily="34" charset="0"/>
                 <a:ea typeface="Microsoft JhengHei" pitchFamily="34" charset="-122"/>
@@ -8388,7 +8388,7 @@
             <a:r>
               <a:rPr lang="en-US" sz="1400" dirty="0">
                 <a:solidFill>
-                  <a:srgbClr val="E6EDF3"/>
+                  <a:srgbClr val="1F2328"/>
                 </a:solidFill>
                 <a:latin typeface="Microsoft JhengHei" pitchFamily="34" charset="0"/>
                 <a:ea typeface="Microsoft JhengHei" pitchFamily="34" charset="-122"/>
@@ -8411,7 +8411,7 @@
             <a:r>
               <a:rPr lang="en-US" sz="1400" b="1" dirty="0">
                 <a:solidFill>
-                  <a:srgbClr val="22D3EE"/>
+                  <a:srgbClr val="0369A1"/>
                 </a:solidFill>
                 <a:latin typeface="Consolas" pitchFamily="34" charset="0"/>
                 <a:ea typeface="Consolas" pitchFamily="34" charset="-122"/>
@@ -8431,7 +8431,7 @@
             <a:r>
               <a:rPr lang="en-US" sz="1400" b="1" dirty="0">
                 <a:solidFill>
-                  <a:srgbClr val="E6EDF3"/>
+                  <a:srgbClr val="1F2328"/>
                 </a:solidFill>
                 <a:latin typeface="Microsoft JhengHei" pitchFamily="34" charset="0"/>
                 <a:ea typeface="Microsoft JhengHei" pitchFamily="34" charset="-122"/>
@@ -8451,7 +8451,7 @@
             <a:r>
               <a:rPr lang="en-US" sz="1400" dirty="0">
                 <a:solidFill>
-                  <a:srgbClr val="E6EDF3"/>
+                  <a:srgbClr val="1F2328"/>
                 </a:solidFill>
                 <a:latin typeface="Microsoft JhengHei" pitchFamily="34" charset="0"/>
                 <a:ea typeface="Microsoft JhengHei" pitchFamily="34" charset="-122"/>
@@ -8474,7 +8474,7 @@
             <a:r>
               <a:rPr lang="en-US" sz="1400" b="1" dirty="0">
                 <a:solidFill>
-                  <a:srgbClr val="22D3EE"/>
+                  <a:srgbClr val="0369A1"/>
                 </a:solidFill>
                 <a:latin typeface="Consolas" pitchFamily="34" charset="0"/>
                 <a:ea typeface="Consolas" pitchFamily="34" charset="-122"/>
@@ -8494,7 +8494,7 @@
             <a:r>
               <a:rPr lang="en-US" sz="1400" dirty="0">
                 <a:solidFill>
-                  <a:srgbClr val="E6EDF3"/>
+                  <a:srgbClr val="1F2328"/>
                 </a:solidFill>
                 <a:latin typeface="Microsoft JhengHei" pitchFamily="34" charset="0"/>
                 <a:ea typeface="Microsoft JhengHei" pitchFamily="34" charset="-122"/>
@@ -8514,7 +8514,7 @@
             <a:r>
               <a:rPr lang="en-US" sz="1400" b="1" dirty="0">
                 <a:solidFill>
-                  <a:srgbClr val="E6EDF3"/>
+                  <a:srgbClr val="1F2328"/>
                 </a:solidFill>
                 <a:latin typeface="Microsoft JhengHei" pitchFamily="34" charset="0"/>
                 <a:ea typeface="Microsoft JhengHei" pitchFamily="34" charset="-122"/>
@@ -8537,7 +8537,7 @@
             <a:r>
               <a:rPr lang="en-US" sz="1400" b="1" dirty="0">
                 <a:solidFill>
-                  <a:srgbClr val="22D3EE"/>
+                  <a:srgbClr val="0369A1"/>
                 </a:solidFill>
                 <a:latin typeface="Consolas" pitchFamily="34" charset="0"/>
                 <a:ea typeface="Consolas" pitchFamily="34" charset="-122"/>
@@ -8557,7 +8557,7 @@
             <a:r>
               <a:rPr lang="en-US" sz="1400" dirty="0">
                 <a:solidFill>
-                  <a:srgbClr val="E6EDF3"/>
+                  <a:srgbClr val="1F2328"/>
                 </a:solidFill>
                 <a:latin typeface="Microsoft JhengHei" pitchFamily="34" charset="0"/>
                 <a:ea typeface="Microsoft JhengHei" pitchFamily="34" charset="-122"/>
@@ -8577,7 +8577,7 @@
             <a:r>
               <a:rPr lang="en-US" sz="1400" b="1" dirty="0">
                 <a:solidFill>
-                  <a:srgbClr val="E6EDF3"/>
+                  <a:srgbClr val="1F2328"/>
                 </a:solidFill>
                 <a:latin typeface="Microsoft JhengHei" pitchFamily="34" charset="0"/>
                 <a:ea typeface="Microsoft JhengHei" pitchFamily="34" charset="-122"/>
@@ -8600,7 +8600,7 @@
             <a:r>
               <a:rPr lang="en-US" sz="1400" b="1" dirty="0">
                 <a:solidFill>
-                  <a:srgbClr val="22D3EE"/>
+                  <a:srgbClr val="0369A1"/>
                 </a:solidFill>
                 <a:latin typeface="Consolas" pitchFamily="34" charset="0"/>
                 <a:ea typeface="Consolas" pitchFamily="34" charset="-122"/>
@@ -8620,7 +8620,7 @@
             <a:r>
               <a:rPr lang="en-US" sz="1400" dirty="0">
                 <a:solidFill>
-                  <a:srgbClr val="E6EDF3"/>
+                  <a:srgbClr val="1F2328"/>
                 </a:solidFill>
                 <a:latin typeface="Microsoft JhengHei" pitchFamily="34" charset="0"/>
                 <a:ea typeface="Microsoft JhengHei" pitchFamily="34" charset="-122"/>
@@ -8640,7 +8640,7 @@
             <a:r>
               <a:rPr lang="en-US" sz="1400" b="1" dirty="0">
                 <a:solidFill>
-                  <a:srgbClr val="E6EDF3"/>
+                  <a:srgbClr val="1F2328"/>
                 </a:solidFill>
                 <a:latin typeface="Microsoft JhengHei" pitchFamily="34" charset="0"/>
                 <a:ea typeface="Microsoft JhengHei" pitchFamily="34" charset="-122"/>
@@ -8663,7 +8663,7 @@
             <a:r>
               <a:rPr lang="en-US" sz="1400" b="1" dirty="0">
                 <a:solidFill>
-                  <a:srgbClr val="22D3EE"/>
+                  <a:srgbClr val="0369A1"/>
                 </a:solidFill>
                 <a:latin typeface="Consolas" pitchFamily="34" charset="0"/>
                 <a:ea typeface="Consolas" pitchFamily="34" charset="-122"/>
@@ -8683,7 +8683,7 @@
             <a:r>
               <a:rPr lang="en-US" sz="1400" dirty="0">
                 <a:solidFill>
-                  <a:srgbClr val="22D3EE"/>
+                  <a:srgbClr val="0369A1"/>
                 </a:solidFill>
                 <a:latin typeface="Consolas" pitchFamily="34" charset="0"/>
                 <a:ea typeface="Consolas" pitchFamily="34" charset="-122"/>
@@ -8712,11 +8712,11 @@
             </a:avLst>
           </a:prstGeom>
           <a:solidFill>
-            <a:srgbClr val="161B22"/>
+            <a:srgbClr val="F6F8FA"/>
           </a:solidFill>
           <a:ln w="9525">
             <a:solidFill>
-              <a:srgbClr val="30363D"/>
+              <a:srgbClr val="D0D7DE"/>
             </a:solidFill>
             <a:prstDash val="solid"/>
           </a:ln>
@@ -8749,7 +8749,7 @@
             <a:r>
               <a:rPr lang="en-US" sz="2600" b="1" dirty="0">
                 <a:solidFill>
-                  <a:srgbClr val="22D3EE"/>
+                  <a:srgbClr val="0369A1"/>
                 </a:solidFill>
                 <a:latin typeface="Consolas" pitchFamily="34" charset="0"/>
                 <a:ea typeface="Consolas" pitchFamily="34" charset="-122"/>
@@ -8788,7 +8788,7 @@
             <a:r>
               <a:rPr lang="en-US" sz="1150" dirty="0">
                 <a:solidFill>
-                  <a:srgbClr val="9DA7B3"/>
+                  <a:srgbClr val="57606A"/>
                 </a:solidFill>
                 <a:latin typeface="Microsoft JhengHei" pitchFamily="34" charset="0"/>
                 <a:ea typeface="Microsoft JhengHei" pitchFamily="34" charset="-122"/>
@@ -8805,7 +8805,7 @@
             <a:r>
               <a:rPr lang="en-US" sz="1150" dirty="0">
                 <a:solidFill>
-                  <a:srgbClr val="9DA7B3"/>
+                  <a:srgbClr val="57606A"/>
                 </a:solidFill>
                 <a:latin typeface="Microsoft JhengHei" pitchFamily="34" charset="0"/>
                 <a:ea typeface="Microsoft JhengHei" pitchFamily="34" charset="-122"/>
@@ -8834,11 +8834,11 @@
             </a:avLst>
           </a:prstGeom>
           <a:solidFill>
-            <a:srgbClr val="161B22"/>
+            <a:srgbClr val="F6F8FA"/>
           </a:solidFill>
           <a:ln w="9525">
             <a:solidFill>
-              <a:srgbClr val="30363D"/>
+              <a:srgbClr val="D0D7DE"/>
             </a:solidFill>
             <a:prstDash val="solid"/>
           </a:ln>
@@ -8871,7 +8871,7 @@
             <a:r>
               <a:rPr lang="en-US" sz="2600" b="1" dirty="0">
                 <a:solidFill>
-                  <a:srgbClr val="F59E0B"/>
+                  <a:srgbClr val="B45309"/>
                 </a:solidFill>
                 <a:latin typeface="Consolas" pitchFamily="34" charset="0"/>
                 <a:ea typeface="Consolas" pitchFamily="34" charset="-122"/>
@@ -8910,7 +8910,7 @@
             <a:r>
               <a:rPr lang="en-US" sz="1150" dirty="0">
                 <a:solidFill>
-                  <a:srgbClr val="9DA7B3"/>
+                  <a:srgbClr val="57606A"/>
                 </a:solidFill>
                 <a:latin typeface="Microsoft JhengHei" pitchFamily="34" charset="0"/>
                 <a:ea typeface="Microsoft JhengHei" pitchFamily="34" charset="-122"/>
@@ -8927,7 +8927,7 @@
             <a:r>
               <a:rPr lang="en-US" sz="1150" dirty="0">
                 <a:solidFill>
-                  <a:srgbClr val="9DA7B3"/>
+                  <a:srgbClr val="57606A"/>
                 </a:solidFill>
                 <a:latin typeface="Microsoft JhengHei" pitchFamily="34" charset="0"/>
                 <a:ea typeface="Microsoft JhengHei" pitchFamily="34" charset="-122"/>
@@ -8956,11 +8956,11 @@
             </a:avLst>
           </a:prstGeom>
           <a:solidFill>
-            <a:srgbClr val="161B22"/>
+            <a:srgbClr val="F6F8FA"/>
           </a:solidFill>
           <a:ln w="9525">
             <a:solidFill>
-              <a:srgbClr val="30363D"/>
+              <a:srgbClr val="D0D7DE"/>
             </a:solidFill>
             <a:prstDash val="solid"/>
           </a:ln>
@@ -8993,7 +8993,7 @@
             <a:r>
               <a:rPr lang="en-US" sz="2600" b="1" dirty="0">
                 <a:solidFill>
-                  <a:srgbClr val="F59E0B"/>
+                  <a:srgbClr val="B45309"/>
                 </a:solidFill>
                 <a:latin typeface="Consolas" pitchFamily="34" charset="0"/>
                 <a:ea typeface="Consolas" pitchFamily="34" charset="-122"/>
@@ -9032,7 +9032,7 @@
             <a:r>
               <a:rPr lang="en-US" sz="1150" dirty="0">
                 <a:solidFill>
-                  <a:srgbClr val="9DA7B3"/>
+                  <a:srgbClr val="57606A"/>
                 </a:solidFill>
                 <a:latin typeface="Microsoft JhengHei" pitchFamily="34" charset="0"/>
                 <a:ea typeface="Microsoft JhengHei" pitchFamily="34" charset="-122"/>
@@ -9049,7 +9049,7 @@
             <a:r>
               <a:rPr lang="en-US" sz="1150" dirty="0">
                 <a:solidFill>
-                  <a:srgbClr val="9DA7B3"/>
+                  <a:srgbClr val="57606A"/>
                 </a:solidFill>
                 <a:latin typeface="Microsoft JhengHei" pitchFamily="34" charset="0"/>
                 <a:ea typeface="Microsoft JhengHei" pitchFamily="34" charset="-122"/>
@@ -9078,11 +9078,11 @@
             </a:avLst>
           </a:prstGeom>
           <a:solidFill>
-            <a:srgbClr val="161B22"/>
+            <a:srgbClr val="F6F8FA"/>
           </a:solidFill>
           <a:ln w="9525">
             <a:solidFill>
-              <a:srgbClr val="30363D"/>
+              <a:srgbClr val="D0D7DE"/>
             </a:solidFill>
             <a:prstDash val="solid"/>
           </a:ln>
@@ -9115,7 +9115,7 @@
             <a:r>
               <a:rPr lang="en-US" sz="2600" b="1" dirty="0">
                 <a:solidFill>
-                  <a:srgbClr val="22D3EE"/>
+                  <a:srgbClr val="0369A1"/>
                 </a:solidFill>
                 <a:latin typeface="Consolas" pitchFamily="34" charset="0"/>
                 <a:ea typeface="Consolas" pitchFamily="34" charset="-122"/>
@@ -9154,7 +9154,7 @@
             <a:r>
               <a:rPr lang="en-US" sz="1150" dirty="0">
                 <a:solidFill>
-                  <a:srgbClr val="9DA7B3"/>
+                  <a:srgbClr val="57606A"/>
                 </a:solidFill>
                 <a:latin typeface="Microsoft JhengHei" pitchFamily="34" charset="0"/>
                 <a:ea typeface="Microsoft JhengHei" pitchFamily="34" charset="-122"/>
@@ -9171,7 +9171,7 @@
             <a:r>
               <a:rPr lang="en-US" sz="1150" dirty="0">
                 <a:solidFill>
-                  <a:srgbClr val="9DA7B3"/>
+                  <a:srgbClr val="57606A"/>
                 </a:solidFill>
                 <a:latin typeface="Microsoft JhengHei" pitchFamily="34" charset="0"/>
                 <a:ea typeface="Microsoft JhengHei" pitchFamily="34" charset="-122"/>
@@ -9197,7 +9197,7 @@
     <p:bg>
       <p:bgPr>
         <a:solidFill>
-          <a:srgbClr val="0D1117"/>
+          <a:srgbClr val="FFFFFF"/>
         </a:solidFill>
       </p:bgPr>
     </p:bg>
@@ -9232,7 +9232,7 @@
           <a:noFill/>
           <a:ln w="9525">
             <a:solidFill>
-              <a:srgbClr val="30363D"/>
+              <a:srgbClr val="D0D7DE"/>
             </a:solidFill>
             <a:prstDash val="solid"/>
           </a:ln>
@@ -9265,7 +9265,7 @@
             <a:r>
               <a:rPr lang="en-US" sz="900" b="1" dirty="0">
                 <a:solidFill>
-                  <a:srgbClr val="22D3EE"/>
+                  <a:srgbClr val="0369A1"/>
                 </a:solidFill>
                 <a:latin typeface="Consolas" pitchFamily="34" charset="0"/>
                 <a:ea typeface="Consolas" pitchFamily="34" charset="-122"/>
@@ -9279,7 +9279,7 @@
             <a:r>
               <a:rPr lang="en-US" sz="900" dirty="0">
                 <a:solidFill>
-                  <a:srgbClr val="7D8590"/>
+                  <a:srgbClr val="6E7781"/>
                 </a:solidFill>
                 <a:latin typeface="Consolas" pitchFamily="34" charset="0"/>
                 <a:ea typeface="Consolas" pitchFamily="34" charset="-122"/>
@@ -9318,7 +9318,7 @@
             <a:r>
               <a:rPr lang="en-US" sz="900" dirty="0">
                 <a:solidFill>
-                  <a:srgbClr val="7D8590"/>
+                  <a:srgbClr val="6E7781"/>
                 </a:solidFill>
                 <a:latin typeface="Consolas" pitchFamily="34" charset="0"/>
                 <a:ea typeface="Consolas" pitchFamily="34" charset="-122"/>
@@ -9357,7 +9357,7 @@
             <a:r>
               <a:rPr lang="en-US" sz="1100" b="1" spc="300" kern="0" dirty="0">
                 <a:solidFill>
-                  <a:srgbClr val="22D3EE"/>
+                  <a:srgbClr val="0369A1"/>
                 </a:solidFill>
                 <a:latin typeface="Consolas" pitchFamily="34" charset="0"/>
                 <a:ea typeface="Consolas" pitchFamily="34" charset="-122"/>
@@ -9396,7 +9396,7 @@
             <a:r>
               <a:rPr lang="en-US" sz="3000" b="1" dirty="0">
                 <a:solidFill>
-                  <a:srgbClr val="E6EDF3"/>
+                  <a:srgbClr val="1F2328"/>
                 </a:solidFill>
                 <a:latin typeface="Microsoft JhengHei" pitchFamily="34" charset="0"/>
                 <a:ea typeface="Microsoft JhengHei" pitchFamily="34" charset="-122"/>
@@ -9425,7 +9425,7 @@
           <a:noFill/>
           <a:ln w="31750">
             <a:solidFill>
-              <a:srgbClr val="22D3EE"/>
+              <a:srgbClr val="0369A1"/>
             </a:solidFill>
             <a:prstDash val="solid"/>
           </a:ln>
@@ -9448,11 +9448,11 @@
             </a:avLst>
           </a:prstGeom>
           <a:solidFill>
-            <a:srgbClr val="161B22"/>
+            <a:srgbClr val="F6F8FA"/>
           </a:solidFill>
           <a:ln w="9525">
             <a:solidFill>
-              <a:srgbClr val="30363D"/>
+              <a:srgbClr val="D0D7DE"/>
             </a:solidFill>
             <a:prstDash val="solid"/>
           </a:ln>
@@ -9485,7 +9485,7 @@
             <a:r>
               <a:rPr lang="en-US" sz="1600" b="1" dirty="0">
                 <a:solidFill>
-                  <a:srgbClr val="E6EDF3"/>
+                  <a:srgbClr val="1F2328"/>
                 </a:solidFill>
                 <a:latin typeface="Microsoft JhengHei" pitchFamily="34" charset="0"/>
                 <a:ea typeface="Microsoft JhengHei" pitchFamily="34" charset="-122"/>
@@ -9524,7 +9524,7 @@
             <a:r>
               <a:rPr lang="en-US" sz="1200" b="1" dirty="0">
                 <a:solidFill>
-                  <a:srgbClr val="F59E0B"/>
+                  <a:srgbClr val="B45309"/>
                 </a:solidFill>
                 <a:latin typeface="Microsoft JhengHei" pitchFamily="34" charset="0"/>
                 <a:ea typeface="Microsoft JhengHei" pitchFamily="34" charset="-122"/>
@@ -9569,7 +9569,7 @@
             <a:r>
               <a:rPr lang="en-US" sz="1250" b="1" dirty="0">
                 <a:solidFill>
-                  <a:srgbClr val="22D3EE"/>
+                  <a:srgbClr val="0369A1"/>
                 </a:solidFill>
                 <a:latin typeface="Consolas" pitchFamily="34" charset="0"/>
                 <a:ea typeface="Consolas" pitchFamily="34" charset="-122"/>
@@ -9589,7 +9589,7 @@
             <a:r>
               <a:rPr lang="en-US" sz="1250" dirty="0">
                 <a:solidFill>
-                  <a:srgbClr val="E6EDF3"/>
+                  <a:srgbClr val="1F2328"/>
                 </a:solidFill>
                 <a:latin typeface="Microsoft JhengHei" pitchFamily="34" charset="0"/>
                 <a:ea typeface="Microsoft JhengHei" pitchFamily="34" charset="-122"/>
@@ -9612,7 +9612,7 @@
             <a:r>
               <a:rPr lang="en-US" sz="1250" b="1" dirty="0">
                 <a:solidFill>
-                  <a:srgbClr val="22D3EE"/>
+                  <a:srgbClr val="0369A1"/>
                 </a:solidFill>
                 <a:latin typeface="Consolas" pitchFamily="34" charset="0"/>
                 <a:ea typeface="Consolas" pitchFamily="34" charset="-122"/>
@@ -9632,7 +9632,7 @@
             <a:r>
               <a:rPr lang="en-US" sz="1250" dirty="0">
                 <a:solidFill>
-                  <a:srgbClr val="E6EDF3"/>
+                  <a:srgbClr val="1F2328"/>
                 </a:solidFill>
                 <a:latin typeface="Microsoft JhengHei" pitchFamily="34" charset="0"/>
                 <a:ea typeface="Microsoft JhengHei" pitchFamily="34" charset="-122"/>
@@ -9655,7 +9655,7 @@
             <a:r>
               <a:rPr lang="en-US" sz="1250" b="1" dirty="0">
                 <a:solidFill>
-                  <a:srgbClr val="22D3EE"/>
+                  <a:srgbClr val="0369A1"/>
                 </a:solidFill>
                 <a:latin typeface="Consolas" pitchFamily="34" charset="0"/>
                 <a:ea typeface="Consolas" pitchFamily="34" charset="-122"/>
@@ -9675,7 +9675,7 @@
             <a:r>
               <a:rPr lang="en-US" sz="1250" dirty="0">
                 <a:solidFill>
-                  <a:srgbClr val="E6EDF3"/>
+                  <a:srgbClr val="1F2328"/>
                 </a:solidFill>
                 <a:latin typeface="Microsoft JhengHei" pitchFamily="34" charset="0"/>
                 <a:ea typeface="Microsoft JhengHei" pitchFamily="34" charset="-122"/>
@@ -9714,7 +9714,7 @@
             <a:r>
               <a:rPr lang="en-US" sz="1100" dirty="0">
                 <a:solidFill>
-                  <a:srgbClr val="22D3EE"/>
+                  <a:srgbClr val="0369A1"/>
                 </a:solidFill>
                 <a:latin typeface="Consolas" pitchFamily="34" charset="0"/>
                 <a:ea typeface="Consolas" pitchFamily="34" charset="-122"/>
@@ -9743,11 +9743,11 @@
             </a:avLst>
           </a:prstGeom>
           <a:solidFill>
-            <a:srgbClr val="161B22"/>
+            <a:srgbClr val="F6F8FA"/>
           </a:solidFill>
           <a:ln w="9525">
             <a:solidFill>
-              <a:srgbClr val="30363D"/>
+              <a:srgbClr val="D0D7DE"/>
             </a:solidFill>
             <a:prstDash val="solid"/>
           </a:ln>
@@ -9780,7 +9780,7 @@
             <a:r>
               <a:rPr lang="en-US" sz="1600" b="1" dirty="0">
                 <a:solidFill>
-                  <a:srgbClr val="E6EDF3"/>
+                  <a:srgbClr val="1F2328"/>
                 </a:solidFill>
                 <a:latin typeface="Microsoft JhengHei" pitchFamily="34" charset="0"/>
                 <a:ea typeface="Microsoft JhengHei" pitchFamily="34" charset="-122"/>
@@ -9819,7 +9819,7 @@
             <a:r>
               <a:rPr lang="en-US" sz="1200" b="1" dirty="0">
                 <a:solidFill>
-                  <a:srgbClr val="F59E0B"/>
+                  <a:srgbClr val="B45309"/>
                 </a:solidFill>
                 <a:latin typeface="Microsoft JhengHei" pitchFamily="34" charset="0"/>
                 <a:ea typeface="Microsoft JhengHei" pitchFamily="34" charset="-122"/>
@@ -9864,7 +9864,7 @@
             <a:r>
               <a:rPr lang="en-US" sz="1250" b="1" dirty="0">
                 <a:solidFill>
-                  <a:srgbClr val="22D3EE"/>
+                  <a:srgbClr val="0369A1"/>
                 </a:solidFill>
                 <a:latin typeface="Consolas" pitchFamily="34" charset="0"/>
                 <a:ea typeface="Consolas" pitchFamily="34" charset="-122"/>
@@ -9884,7 +9884,7 @@
             <a:r>
               <a:rPr lang="en-US" sz="1250" dirty="0">
                 <a:solidFill>
-                  <a:srgbClr val="E6EDF3"/>
+                  <a:srgbClr val="1F2328"/>
                 </a:solidFill>
                 <a:latin typeface="Microsoft JhengHei" pitchFamily="34" charset="0"/>
                 <a:ea typeface="Microsoft JhengHei" pitchFamily="34" charset="-122"/>
@@ -9907,7 +9907,7 @@
             <a:r>
               <a:rPr lang="en-US" sz="1250" b="1" dirty="0">
                 <a:solidFill>
-                  <a:srgbClr val="22D3EE"/>
+                  <a:srgbClr val="0369A1"/>
                 </a:solidFill>
                 <a:latin typeface="Consolas" pitchFamily="34" charset="0"/>
                 <a:ea typeface="Consolas" pitchFamily="34" charset="-122"/>
@@ -9927,7 +9927,7 @@
             <a:r>
               <a:rPr lang="en-US" sz="1250" dirty="0">
                 <a:solidFill>
-                  <a:srgbClr val="E6EDF3"/>
+                  <a:srgbClr val="1F2328"/>
                 </a:solidFill>
                 <a:latin typeface="Microsoft JhengHei" pitchFamily="34" charset="0"/>
                 <a:ea typeface="Microsoft JhengHei" pitchFamily="34" charset="-122"/>
@@ -9950,7 +9950,7 @@
             <a:r>
               <a:rPr lang="en-US" sz="1250" b="1" dirty="0">
                 <a:solidFill>
-                  <a:srgbClr val="22D3EE"/>
+                  <a:srgbClr val="0369A1"/>
                 </a:solidFill>
                 <a:latin typeface="Consolas" pitchFamily="34" charset="0"/>
                 <a:ea typeface="Consolas" pitchFamily="34" charset="-122"/>
@@ -9970,7 +9970,7 @@
             <a:r>
               <a:rPr lang="en-US" sz="1250" dirty="0">
                 <a:solidFill>
-                  <a:srgbClr val="E6EDF3"/>
+                  <a:srgbClr val="1F2328"/>
                 </a:solidFill>
                 <a:latin typeface="Microsoft JhengHei" pitchFamily="34" charset="0"/>
                 <a:ea typeface="Microsoft JhengHei" pitchFamily="34" charset="-122"/>
@@ -10009,7 +10009,7 @@
             <a:r>
               <a:rPr lang="en-US" sz="1100" dirty="0">
                 <a:solidFill>
-                  <a:srgbClr val="22D3EE"/>
+                  <a:srgbClr val="0369A1"/>
                 </a:solidFill>
                 <a:latin typeface="Consolas" pitchFamily="34" charset="0"/>
                 <a:ea typeface="Consolas" pitchFamily="34" charset="-122"/>
@@ -10035,7 +10035,7 @@
     <p:bg>
       <p:bgPr>
         <a:solidFill>
-          <a:srgbClr val="0D1117"/>
+          <a:srgbClr val="FFFFFF"/>
         </a:solidFill>
       </p:bgPr>
     </p:bg>
@@ -10070,7 +10070,7 @@
           <a:noFill/>
           <a:ln w="9525">
             <a:solidFill>
-              <a:srgbClr val="30363D"/>
+              <a:srgbClr val="D0D7DE"/>
             </a:solidFill>
             <a:prstDash val="solid"/>
           </a:ln>
@@ -10103,7 +10103,7 @@
             <a:r>
               <a:rPr lang="en-US" sz="900" b="1" dirty="0">
                 <a:solidFill>
-                  <a:srgbClr val="22D3EE"/>
+                  <a:srgbClr val="0369A1"/>
                 </a:solidFill>
                 <a:latin typeface="Consolas" pitchFamily="34" charset="0"/>
                 <a:ea typeface="Consolas" pitchFamily="34" charset="-122"/>
@@ -10117,7 +10117,7 @@
             <a:r>
               <a:rPr lang="en-US" sz="900" dirty="0">
                 <a:solidFill>
-                  <a:srgbClr val="7D8590"/>
+                  <a:srgbClr val="6E7781"/>
                 </a:solidFill>
                 <a:latin typeface="Consolas" pitchFamily="34" charset="0"/>
                 <a:ea typeface="Consolas" pitchFamily="34" charset="-122"/>
@@ -10156,7 +10156,7 @@
             <a:r>
               <a:rPr lang="en-US" sz="900" dirty="0">
                 <a:solidFill>
-                  <a:srgbClr val="7D8590"/>
+                  <a:srgbClr val="6E7781"/>
                 </a:solidFill>
                 <a:latin typeface="Consolas" pitchFamily="34" charset="0"/>
                 <a:ea typeface="Consolas" pitchFamily="34" charset="-122"/>
@@ -10195,7 +10195,7 @@
             <a:r>
               <a:rPr lang="en-US" sz="1100" b="1" spc="300" kern="0" dirty="0">
                 <a:solidFill>
-                  <a:srgbClr val="22D3EE"/>
+                  <a:srgbClr val="0369A1"/>
                 </a:solidFill>
                 <a:latin typeface="Consolas" pitchFamily="34" charset="0"/>
                 <a:ea typeface="Consolas" pitchFamily="34" charset="-122"/>
@@ -10234,7 +10234,7 @@
             <a:r>
               <a:rPr lang="en-US" sz="3000" b="1" dirty="0">
                 <a:solidFill>
-                  <a:srgbClr val="E6EDF3"/>
+                  <a:srgbClr val="1F2328"/>
                 </a:solidFill>
                 <a:latin typeface="Microsoft JhengHei" pitchFamily="34" charset="0"/>
                 <a:ea typeface="Microsoft JhengHei" pitchFamily="34" charset="-122"/>
@@ -10263,7 +10263,7 @@
           <a:noFill/>
           <a:ln w="31750">
             <a:solidFill>
-              <a:srgbClr val="22D3EE"/>
+              <a:srgbClr val="0369A1"/>
             </a:solidFill>
             <a:prstDash val="solid"/>
           </a:ln>
@@ -10296,7 +10296,7 @@
             <a:r>
               <a:rPr lang="en-US" sz="1500" b="1" dirty="0">
                 <a:solidFill>
-                  <a:srgbClr val="22D3EE"/>
+                  <a:srgbClr val="0369A1"/>
                 </a:solidFill>
                 <a:latin typeface="Consolas" pitchFamily="34" charset="0"/>
                 <a:ea typeface="Consolas" pitchFamily="34" charset="-122"/>
@@ -10310,7 +10310,7 @@
             <a:r>
               <a:rPr lang="en-US" sz="1500" b="1" dirty="0">
                 <a:solidFill>
-                  <a:srgbClr val="E6EDF3"/>
+                  <a:srgbClr val="1F2328"/>
                 </a:solidFill>
                 <a:latin typeface="Microsoft JhengHei" pitchFamily="34" charset="0"/>
                 <a:ea typeface="Microsoft JhengHei" pitchFamily="34" charset="-122"/>
@@ -10352,7 +10352,7 @@
             <a:r>
               <a:rPr lang="en-US" sz="1350" dirty="0">
                 <a:solidFill>
-                  <a:srgbClr val="9DA7B3"/>
+                  <a:srgbClr val="57606A"/>
                 </a:solidFill>
                 <a:latin typeface="Microsoft JhengHei" pitchFamily="34" charset="0"/>
                 <a:ea typeface="Microsoft JhengHei" pitchFamily="34" charset="-122"/>
@@ -10381,7 +10381,7 @@
           <a:noFill/>
           <a:ln w="6350">
             <a:solidFill>
-              <a:srgbClr val="30363D"/>
+              <a:srgbClr val="D0D7DE"/>
             </a:solidFill>
             <a:prstDash val="solid"/>
           </a:ln>
@@ -10414,7 +10414,7 @@
             <a:r>
               <a:rPr lang="en-US" sz="1500" b="1" dirty="0">
                 <a:solidFill>
-                  <a:srgbClr val="22D3EE"/>
+                  <a:srgbClr val="0369A1"/>
                 </a:solidFill>
                 <a:latin typeface="Consolas" pitchFamily="34" charset="0"/>
                 <a:ea typeface="Consolas" pitchFamily="34" charset="-122"/>
@@ -10428,7 +10428,7 @@
             <a:r>
               <a:rPr lang="en-US" sz="1500" b="1" dirty="0">
                 <a:solidFill>
-                  <a:srgbClr val="E6EDF3"/>
+                  <a:srgbClr val="1F2328"/>
                 </a:solidFill>
                 <a:latin typeface="Microsoft JhengHei" pitchFamily="34" charset="0"/>
                 <a:ea typeface="Microsoft JhengHei" pitchFamily="34" charset="-122"/>
@@ -10470,7 +10470,7 @@
             <a:r>
               <a:rPr lang="en-US" sz="1350" dirty="0">
                 <a:solidFill>
-                  <a:srgbClr val="9DA7B3"/>
+                  <a:srgbClr val="57606A"/>
                 </a:solidFill>
                 <a:latin typeface="Microsoft JhengHei" pitchFamily="34" charset="0"/>
                 <a:ea typeface="Microsoft JhengHei" pitchFamily="34" charset="-122"/>
@@ -10499,7 +10499,7 @@
           <a:noFill/>
           <a:ln w="6350">
             <a:solidFill>
-              <a:srgbClr val="30363D"/>
+              <a:srgbClr val="D0D7DE"/>
             </a:solidFill>
             <a:prstDash val="solid"/>
           </a:ln>
@@ -10532,7 +10532,7 @@
             <a:r>
               <a:rPr lang="en-US" sz="1500" b="1" dirty="0">
                 <a:solidFill>
-                  <a:srgbClr val="22D3EE"/>
+                  <a:srgbClr val="0369A1"/>
                 </a:solidFill>
                 <a:latin typeface="Consolas" pitchFamily="34" charset="0"/>
                 <a:ea typeface="Consolas" pitchFamily="34" charset="-122"/>
@@ -10546,7 +10546,7 @@
             <a:r>
               <a:rPr lang="en-US" sz="1500" b="1" dirty="0">
                 <a:solidFill>
-                  <a:srgbClr val="E6EDF3"/>
+                  <a:srgbClr val="1F2328"/>
                 </a:solidFill>
                 <a:latin typeface="Microsoft JhengHei" pitchFamily="34" charset="0"/>
                 <a:ea typeface="Microsoft JhengHei" pitchFamily="34" charset="-122"/>
@@ -10588,7 +10588,7 @@
             <a:r>
               <a:rPr lang="en-US" sz="1350" dirty="0">
                 <a:solidFill>
-                  <a:srgbClr val="9DA7B3"/>
+                  <a:srgbClr val="57606A"/>
                 </a:solidFill>
                 <a:latin typeface="Microsoft JhengHei" pitchFamily="34" charset="0"/>
                 <a:ea typeface="Microsoft JhengHei" pitchFamily="34" charset="-122"/>
@@ -10617,7 +10617,7 @@
           <a:noFill/>
           <a:ln w="6350">
             <a:solidFill>
-              <a:srgbClr val="30363D"/>
+              <a:srgbClr val="D0D7DE"/>
             </a:solidFill>
             <a:prstDash val="solid"/>
           </a:ln>
@@ -10650,7 +10650,7 @@
             <a:r>
               <a:rPr lang="en-US" sz="1500" b="1" dirty="0">
                 <a:solidFill>
-                  <a:srgbClr val="22D3EE"/>
+                  <a:srgbClr val="0369A1"/>
                 </a:solidFill>
                 <a:latin typeface="Consolas" pitchFamily="34" charset="0"/>
                 <a:ea typeface="Consolas" pitchFamily="34" charset="-122"/>
@@ -10664,7 +10664,7 @@
             <a:r>
               <a:rPr lang="en-US" sz="1500" b="1" dirty="0">
                 <a:solidFill>
-                  <a:srgbClr val="E6EDF3"/>
+                  <a:srgbClr val="1F2328"/>
                 </a:solidFill>
                 <a:latin typeface="Microsoft JhengHei" pitchFamily="34" charset="0"/>
                 <a:ea typeface="Microsoft JhengHei" pitchFamily="34" charset="-122"/>
@@ -10706,7 +10706,7 @@
             <a:r>
               <a:rPr lang="en-US" sz="1350" dirty="0">
                 <a:solidFill>
-                  <a:srgbClr val="9DA7B3"/>
+                  <a:srgbClr val="57606A"/>
                 </a:solidFill>
                 <a:latin typeface="Microsoft JhengHei" pitchFamily="34" charset="0"/>
                 <a:ea typeface="Microsoft JhengHei" pitchFamily="34" charset="-122"/>
@@ -10735,7 +10735,7 @@
           <a:noFill/>
           <a:ln w="6350">
             <a:solidFill>
-              <a:srgbClr val="30363D"/>
+              <a:srgbClr val="D0D7DE"/>
             </a:solidFill>
             <a:prstDash val="solid"/>
           </a:ln>
@@ -10768,7 +10768,7 @@
             <a:r>
               <a:rPr lang="en-US" sz="1500" b="1" dirty="0">
                 <a:solidFill>
-                  <a:srgbClr val="22D3EE"/>
+                  <a:srgbClr val="0369A1"/>
                 </a:solidFill>
                 <a:latin typeface="Consolas" pitchFamily="34" charset="0"/>
                 <a:ea typeface="Consolas" pitchFamily="34" charset="-122"/>
@@ -10782,7 +10782,7 @@
             <a:r>
               <a:rPr lang="en-US" sz="1500" b="1" dirty="0">
                 <a:solidFill>
-                  <a:srgbClr val="E6EDF3"/>
+                  <a:srgbClr val="1F2328"/>
                 </a:solidFill>
                 <a:latin typeface="Microsoft JhengHei" pitchFamily="34" charset="0"/>
                 <a:ea typeface="Microsoft JhengHei" pitchFamily="34" charset="-122"/>
@@ -10824,7 +10824,7 @@
             <a:r>
               <a:rPr lang="en-US" sz="1350" dirty="0">
                 <a:solidFill>
-                  <a:srgbClr val="9DA7B3"/>
+                  <a:srgbClr val="57606A"/>
                 </a:solidFill>
                 <a:latin typeface="Microsoft JhengHei" pitchFamily="34" charset="0"/>
                 <a:ea typeface="Microsoft JhengHei" pitchFamily="34" charset="-122"/>
